--- a/GREENCELL_BIOME_PDRN_제품소개서.pptx
+++ b/GREENCELL_BIOME_PDRN_제품소개서.pptx
@@ -4013,9 +4013,9 @@
                 <a:solidFill>
                   <a:srgbClr val="8FE3C4"/>
                 </a:solidFill>
-                <a:latin typeface="맑은 고딕"/>
-                <a:ea typeface="맑은 고딕"/>
-                <a:cs typeface="맑은 고딕"/>
+                <a:latin typeface="Noto Sans KR"/>
+                <a:ea typeface="Noto Sans KR"/>
+                <a:cs typeface="Noto Sans KR"/>
               </a:rPr>
               <a:t>DNA 유래 재생 과학을 담은 5세대 올인원 크림</a:t>
             </a:r>
@@ -4037,9 +4037,9 @@
                 <a:solidFill>
                   <a:srgbClr val="8FE3C4"/>
                 </a:solidFill>
-                <a:latin typeface="맑은 고딕"/>
-                <a:ea typeface="맑은 고딕"/>
-                <a:cs typeface="맑은 고딕"/>
+                <a:latin typeface="Noto Sans KR"/>
+                <a:ea typeface="Noto Sans KR"/>
+                <a:cs typeface="Noto Sans KR"/>
               </a:rPr>
               <a:t>PDRN CORE + 6 POWER COMPLEX, 한 병으로 완성하는 고농축 스킨케어</a:t>
             </a:r>
@@ -4200,9 +4200,9 @@
                 <a:solidFill>
                   <a:srgbClr val="8FA599"/>
                 </a:solidFill>
-                <a:latin typeface="맑은 고딕"/>
-                <a:ea typeface="맑은 고딕"/>
-                <a:cs typeface="맑은 고딕"/>
+                <a:latin typeface="Noto Sans KR"/>
+                <a:ea typeface="Noto Sans KR"/>
+                <a:cs typeface="Noto Sans KR"/>
               </a:rPr>
               <a:t>※ PDRN 전성분 표기명: 소듐디엔에이(Sodium DNA). 함량·유래는 제조사 확인 후 반영 예정.</a:t>
             </a:r>
@@ -4896,9 +4896,9 @@
                 <a:solidFill>
                   <a:srgbClr val="1C8F55"/>
                 </a:solidFill>
-                <a:latin typeface="맑은 고딕"/>
-                <a:ea typeface="맑은 고딕"/>
-                <a:cs typeface="맑은 고딕"/>
+                <a:latin typeface="Noto Sans KR"/>
+                <a:ea typeface="Noto Sans KR"/>
+                <a:cs typeface="Noto Sans KR"/>
               </a:rPr>
               <a:t>PDRN과 유사 재생 성분 — 역할이 어떻게 다른가</a:t>
             </a:r>
@@ -4989,9 +4989,9 @@
                 <a:solidFill>
                   <a:srgbClr val="FFFFFF"/>
                 </a:solidFill>
-                <a:latin typeface="맑은 고딕"/>
-                <a:ea typeface="맑은 고딕"/>
-                <a:cs typeface="맑은 고딕"/>
+                <a:latin typeface="Noto Sans KR"/>
+                <a:ea typeface="Noto Sans KR"/>
+                <a:cs typeface="Noto Sans KR"/>
               </a:rPr>
               <a:t>성분</a:t>
             </a:r>
@@ -5082,9 +5082,9 @@
                 <a:solidFill>
                   <a:srgbClr val="FFFFFF"/>
                 </a:solidFill>
-                <a:latin typeface="맑은 고딕"/>
-                <a:ea typeface="맑은 고딕"/>
-                <a:cs typeface="맑은 고딕"/>
+                <a:latin typeface="Noto Sans KR"/>
+                <a:ea typeface="Noto Sans KR"/>
+                <a:cs typeface="Noto Sans KR"/>
               </a:rPr>
               <a:t>핵심 역할</a:t>
             </a:r>
@@ -5175,9 +5175,9 @@
                 <a:solidFill>
                   <a:srgbClr val="FFFFFF"/>
                 </a:solidFill>
-                <a:latin typeface="맑은 고딕"/>
-                <a:ea typeface="맑은 고딕"/>
-                <a:cs typeface="맑은 고딕"/>
+                <a:latin typeface="Noto Sans KR"/>
+                <a:ea typeface="Noto Sans KR"/>
+                <a:cs typeface="Noto Sans KR"/>
               </a:rPr>
               <a:t>작용 방식</a:t>
             </a:r>
@@ -5268,9 +5268,9 @@
                 <a:solidFill>
                   <a:srgbClr val="FFFFFF"/>
                 </a:solidFill>
-                <a:latin typeface="맑은 고딕"/>
-                <a:ea typeface="맑은 고딕"/>
-                <a:cs typeface="맑은 고딕"/>
+                <a:latin typeface="Noto Sans KR"/>
+                <a:ea typeface="Noto Sans KR"/>
+                <a:cs typeface="Noto Sans KR"/>
               </a:rPr>
               <a:t>포지션</a:t>
             </a:r>
@@ -5543,9 +5543,9 @@
                 <a:solidFill>
                   <a:srgbClr val="FFFFFF"/>
                 </a:solidFill>
-                <a:latin typeface="맑은 고딕"/>
-                <a:ea typeface="맑은 고딕"/>
-                <a:cs typeface="맑은 고딕"/>
+                <a:latin typeface="Noto Sans KR"/>
+                <a:ea typeface="Noto Sans KR"/>
+                <a:cs typeface="Noto Sans KR"/>
               </a:rPr>
               <a:t>PDRN</a:t>
             </a:r>
@@ -5590,9 +5590,9 @@
                 <a:solidFill>
                   <a:srgbClr val="FFFFFF"/>
                 </a:solidFill>
-                <a:latin typeface="맑은 고딕"/>
-                <a:ea typeface="맑은 고딕"/>
-                <a:cs typeface="맑은 고딕"/>
+                <a:latin typeface="Noto Sans KR"/>
+                <a:ea typeface="Noto Sans KR"/>
+                <a:cs typeface="Noto Sans KR"/>
               </a:rPr>
               <a:t>뉴클레오타이드 공급</a:t>
             </a:r>
@@ -5637,9 +5637,9 @@
                 <a:solidFill>
                   <a:srgbClr val="8FE3C4"/>
                 </a:solidFill>
-                <a:latin typeface="맑은 고딕"/>
-                <a:ea typeface="맑은 고딕"/>
-                <a:cs typeface="맑은 고딕"/>
+                <a:latin typeface="Noto Sans KR"/>
+                <a:ea typeface="Noto Sans KR"/>
+                <a:cs typeface="Noto Sans KR"/>
               </a:rPr>
               <a:t>DNA 단편이 재생에 쓰이는 원재료를 직접 공급</a:t>
             </a:r>
@@ -5684,9 +5684,9 @@
                 <a:solidFill>
                   <a:srgbClr val="2EE87F"/>
                 </a:solidFill>
-                <a:latin typeface="맑은 고딕"/>
-                <a:ea typeface="맑은 고딕"/>
-                <a:cs typeface="맑은 고딕"/>
+                <a:latin typeface="Noto Sans KR"/>
+                <a:ea typeface="Noto Sans KR"/>
+                <a:cs typeface="Noto Sans KR"/>
               </a:rPr>
               <a:t>재생 설계의 출발점</a:t>
             </a:r>
@@ -5915,9 +5915,9 @@
                 <a:solidFill>
                   <a:srgbClr val="142B22"/>
                 </a:solidFill>
-                <a:latin typeface="맑은 고딕"/>
-                <a:ea typeface="맑은 고딕"/>
-                <a:cs typeface="맑은 고딕"/>
+                <a:latin typeface="Noto Sans KR"/>
+                <a:ea typeface="Noto Sans KR"/>
+                <a:cs typeface="Noto Sans KR"/>
               </a:rPr>
               <a:t>성장인자 (5GF)</a:t>
             </a:r>
@@ -5962,9 +5962,9 @@
                 <a:solidFill>
                   <a:srgbClr val="142B22"/>
                 </a:solidFill>
-                <a:latin typeface="맑은 고딕"/>
-                <a:ea typeface="맑은 고딕"/>
-                <a:cs typeface="맑은 고딕"/>
+                <a:latin typeface="Noto Sans KR"/>
+                <a:ea typeface="Noto Sans KR"/>
+                <a:cs typeface="Noto Sans KR"/>
               </a:rPr>
               <a:t>세포 신호 전달</a:t>
             </a:r>
@@ -6009,9 +6009,9 @@
                 <a:solidFill>
                   <a:srgbClr val="6B7D74"/>
                 </a:solidFill>
-                <a:latin typeface="맑은 고딕"/>
-                <a:ea typeface="맑은 고딕"/>
-                <a:cs typeface="맑은 고딕"/>
+                <a:latin typeface="Noto Sans KR"/>
+                <a:ea typeface="Noto Sans KR"/>
+                <a:cs typeface="Noto Sans KR"/>
               </a:rPr>
               <a:t>성장인자가 피부 구성 세포의 활동을 지시</a:t>
             </a:r>
@@ -6056,9 +6056,9 @@
                 <a:solidFill>
                   <a:srgbClr val="1C8F55"/>
                 </a:solidFill>
-                <a:latin typeface="맑은 고딕"/>
-                <a:ea typeface="맑은 고딕"/>
-                <a:cs typeface="맑은 고딕"/>
+                <a:latin typeface="Noto Sans KR"/>
+                <a:ea typeface="Noto Sans KR"/>
+                <a:cs typeface="Noto Sans KR"/>
               </a:rPr>
               <a:t>PDRN과 상호 보완 관계</a:t>
             </a:r>
@@ -6287,9 +6287,9 @@
                 <a:solidFill>
                   <a:srgbClr val="142B22"/>
                 </a:solidFill>
-                <a:latin typeface="맑은 고딕"/>
-                <a:ea typeface="맑은 고딕"/>
-                <a:cs typeface="맑은 고딕"/>
+                <a:latin typeface="Noto Sans KR"/>
+                <a:ea typeface="Noto Sans KR"/>
+                <a:cs typeface="Noto Sans KR"/>
               </a:rPr>
               <a:t>8중 히알루론산</a:t>
             </a:r>
@@ -6334,9 +6334,9 @@
                 <a:solidFill>
                   <a:srgbClr val="142B22"/>
                 </a:solidFill>
-                <a:latin typeface="맑은 고딕"/>
-                <a:ea typeface="맑은 고딕"/>
-                <a:cs typeface="맑은 고딕"/>
+                <a:latin typeface="Noto Sans KR"/>
+                <a:ea typeface="Noto Sans KR"/>
+                <a:cs typeface="Noto Sans KR"/>
               </a:rPr>
               <a:t>수분 저장</a:t>
             </a:r>
@@ -6381,9 +6381,9 @@
                 <a:solidFill>
                   <a:srgbClr val="6B7D74"/>
                 </a:solidFill>
-                <a:latin typeface="맑은 고딕"/>
-                <a:ea typeface="맑은 고딕"/>
-                <a:cs typeface="맑은 고딕"/>
+                <a:latin typeface="Noto Sans KR"/>
+                <a:ea typeface="Noto Sans KR"/>
+                <a:cs typeface="Noto Sans KR"/>
               </a:rPr>
               <a:t>분자량별로 겉·속 수분을 채우고 붙잡아 둠</a:t>
             </a:r>
@@ -6428,9 +6428,9 @@
                 <a:solidFill>
                   <a:srgbClr val="1C8F55"/>
                 </a:solidFill>
-                <a:latin typeface="맑은 고딕"/>
-                <a:ea typeface="맑은 고딕"/>
-                <a:cs typeface="맑은 고딕"/>
+                <a:latin typeface="Noto Sans KR"/>
+                <a:ea typeface="Noto Sans KR"/>
+                <a:cs typeface="Noto Sans KR"/>
               </a:rPr>
               <a:t>재생이 아닌 ‘보습’ 축</a:t>
             </a:r>
@@ -6659,9 +6659,9 @@
                 <a:solidFill>
                   <a:srgbClr val="142B22"/>
                 </a:solidFill>
-                <a:latin typeface="맑은 고딕"/>
-                <a:ea typeface="맑은 고딕"/>
-                <a:cs typeface="맑은 고딕"/>
+                <a:latin typeface="Noto Sans KR"/>
+                <a:ea typeface="Noto Sans KR"/>
+                <a:cs typeface="Noto Sans KR"/>
               </a:rPr>
               <a:t>복합 세라마이드</a:t>
             </a:r>
@@ -6706,9 +6706,9 @@
                 <a:solidFill>
                   <a:srgbClr val="142B22"/>
                 </a:solidFill>
-                <a:latin typeface="맑은 고딕"/>
-                <a:ea typeface="맑은 고딕"/>
-                <a:cs typeface="맑은 고딕"/>
+                <a:latin typeface="Noto Sans KR"/>
+                <a:ea typeface="Noto Sans KR"/>
+                <a:cs typeface="Noto Sans KR"/>
               </a:rPr>
               <a:t>장벽 구성</a:t>
             </a:r>
@@ -6753,9 +6753,9 @@
                 <a:solidFill>
                   <a:srgbClr val="6B7D74"/>
                 </a:solidFill>
-                <a:latin typeface="맑은 고딕"/>
-                <a:ea typeface="맑은 고딕"/>
-                <a:cs typeface="맑은 고딕"/>
+                <a:latin typeface="Noto Sans KR"/>
+                <a:ea typeface="Noto Sans KR"/>
+                <a:cs typeface="Noto Sans KR"/>
               </a:rPr>
               <a:t>장벽 지질을 채워 수분 손실을 물리적으로 차단</a:t>
             </a:r>
@@ -6800,9 +6800,9 @@
                 <a:solidFill>
                   <a:srgbClr val="1C8F55"/>
                 </a:solidFill>
-                <a:latin typeface="맑은 고딕"/>
-                <a:ea typeface="맑은 고딕"/>
-                <a:cs typeface="맑은 고딕"/>
+                <a:latin typeface="Noto Sans KR"/>
+                <a:ea typeface="Noto Sans KR"/>
+                <a:cs typeface="Noto Sans KR"/>
               </a:rPr>
               <a:t>재생이 아닌 ‘방어’ 축</a:t>
             </a:r>
@@ -7031,9 +7031,9 @@
                 <a:solidFill>
                   <a:srgbClr val="142B22"/>
                 </a:solidFill>
-                <a:latin typeface="맑은 고딕"/>
-                <a:ea typeface="맑은 고딕"/>
-                <a:cs typeface="맑은 고딕"/>
+                <a:latin typeface="Noto Sans KR"/>
+                <a:ea typeface="Noto Sans KR"/>
+                <a:cs typeface="Noto Sans KR"/>
               </a:rPr>
               <a:t>발효 · 캘러스 추출물</a:t>
             </a:r>
@@ -7078,9 +7078,9 @@
                 <a:solidFill>
                   <a:srgbClr val="142B22"/>
                 </a:solidFill>
-                <a:latin typeface="맑은 고딕"/>
-                <a:ea typeface="맑은 고딕"/>
-                <a:cs typeface="맑은 고딕"/>
+                <a:latin typeface="Noto Sans KR"/>
+                <a:ea typeface="Noto Sans KR"/>
+                <a:cs typeface="Noto Sans KR"/>
               </a:rPr>
               <a:t>진정 · 컨디셔닝</a:t>
             </a:r>
@@ -7125,9 +7125,9 @@
                 <a:solidFill>
                   <a:srgbClr val="6B7D74"/>
                 </a:solidFill>
-                <a:latin typeface="맑은 고딕"/>
-                <a:ea typeface="맑은 고딕"/>
-                <a:cs typeface="맑은 고딕"/>
+                <a:latin typeface="Noto Sans KR"/>
+                <a:ea typeface="Noto Sans KR"/>
+                <a:cs typeface="Noto Sans KR"/>
               </a:rPr>
               <a:t>발효 유효성분·식물 배양 추출물의 컨디셔닝</a:t>
             </a:r>
@@ -7172,9 +7172,9 @@
                 <a:solidFill>
                   <a:srgbClr val="C87A1E"/>
                 </a:solidFill>
-                <a:latin typeface="맑은 고딕"/>
-                <a:ea typeface="맑은 고딕"/>
-                <a:cs typeface="맑은 고딕"/>
+                <a:latin typeface="Noto Sans KR"/>
+                <a:ea typeface="Noto Sans KR"/>
+                <a:cs typeface="Noto Sans KR"/>
               </a:rPr>
               <a:t>PDRN 대체 원료가 아님</a:t>
             </a:r>
@@ -7219,9 +7219,9 @@
                 <a:solidFill>
                   <a:srgbClr val="6B7D74"/>
                 </a:solidFill>
-                <a:latin typeface="맑은 고딕"/>
-                <a:ea typeface="맑은 고딕"/>
-                <a:cs typeface="맑은 고딕"/>
+                <a:latin typeface="Noto Sans KR"/>
+                <a:ea typeface="Noto Sans KR"/>
+                <a:cs typeface="Noto Sans KR"/>
               </a:rPr>
               <a:t>※ 성분별 역할을 비교한 일반 정보이며 제품 간 효능 비교가 아닙니다. PDRN의 배합·표기명·함량은 제조사 확인 후 확정합니다.</a:t>
             </a:r>
@@ -7524,9 +7524,9 @@
                 <a:solidFill>
                   <a:srgbClr val="8FE3C4"/>
                 </a:solidFill>
-                <a:latin typeface="맑은 고딕"/>
-                <a:ea typeface="맑은 고딕"/>
-                <a:cs typeface="맑은 고딕"/>
+                <a:latin typeface="Noto Sans KR"/>
+                <a:ea typeface="Noto Sans KR"/>
+                <a:cs typeface="Noto Sans KR"/>
               </a:rPr>
               <a:t>현장에서 자주 받는 질문과 표준 응대</a:t>
             </a:r>
@@ -7718,9 +7718,9 @@
                 <a:solidFill>
                   <a:srgbClr val="FFFFFF"/>
                 </a:solidFill>
-                <a:latin typeface="맑은 고딕"/>
-                <a:ea typeface="맑은 고딕"/>
-                <a:cs typeface="맑은 고딕"/>
+                <a:latin typeface="Noto Sans KR"/>
+                <a:ea typeface="Noto Sans KR"/>
+                <a:cs typeface="Noto Sans KR"/>
               </a:rPr>
               <a:t>PDRN이 실제로 들어 있나요?</a:t>
             </a:r>
@@ -7765,9 +7765,9 @@
                 <a:solidFill>
                   <a:srgbClr val="8FE3C4"/>
                 </a:solidFill>
-                <a:latin typeface="맑은 고딕"/>
-                <a:ea typeface="맑은 고딕"/>
-                <a:cs typeface="맑은 고딕"/>
+                <a:latin typeface="Noto Sans KR"/>
+                <a:ea typeface="Noto Sans KR"/>
+                <a:cs typeface="Noto Sans KR"/>
               </a:rPr>
               <a:t>전성분표에 소듐디엔에이(Sodium DNA)로 표기된 성분이</a:t>
             </a:r>
@@ -7789,9 +7789,9 @@
                 <a:solidFill>
                   <a:srgbClr val="8FE3C4"/>
                 </a:solidFill>
-                <a:latin typeface="맑은 고딕"/>
-                <a:ea typeface="맑은 고딕"/>
-                <a:cs typeface="맑은 고딕"/>
+                <a:latin typeface="Noto Sans KR"/>
+                <a:ea typeface="Noto Sans KR"/>
+                <a:cs typeface="Noto Sans KR"/>
               </a:rPr>
               <a:t>PDRN입니다. 함량은 확인 후 안내드립니다.</a:t>
             </a:r>
@@ -7983,9 +7983,9 @@
                 <a:solidFill>
                   <a:srgbClr val="FFFFFF"/>
                 </a:solidFill>
-                <a:latin typeface="맑은 고딕"/>
-                <a:ea typeface="맑은 고딕"/>
-                <a:cs typeface="맑은 고딕"/>
+                <a:latin typeface="Noto Sans KR"/>
+                <a:ea typeface="Noto Sans KR"/>
+                <a:cs typeface="Noto Sans KR"/>
               </a:rPr>
               <a:t>시술(주사)과 같은 효과인가요?</a:t>
             </a:r>
@@ -8030,9 +8030,9 @@
                 <a:solidFill>
                   <a:srgbClr val="8FE3C4"/>
                 </a:solidFill>
-                <a:latin typeface="맑은 고딕"/>
-                <a:ea typeface="맑은 고딕"/>
-                <a:cs typeface="맑은 고딕"/>
+                <a:latin typeface="Noto Sans KR"/>
+                <a:ea typeface="Noto Sans KR"/>
+                <a:cs typeface="Noto Sans KR"/>
               </a:rPr>
               <a:t>아닙니다. 화장품은 피부 표면 케어를 목적으로 하며,</a:t>
             </a:r>
@@ -8054,9 +8054,9 @@
                 <a:solidFill>
                   <a:srgbClr val="8FE3C4"/>
                 </a:solidFill>
-                <a:latin typeface="맑은 고딕"/>
-                <a:ea typeface="맑은 고딕"/>
-                <a:cs typeface="맑은 고딕"/>
+                <a:latin typeface="Noto Sans KR"/>
+                <a:ea typeface="Noto Sans KR"/>
+                <a:cs typeface="Noto Sans KR"/>
               </a:rPr>
               <a:t>의학적 시술과 동일한 효과로 설명할 수 없습니다.</a:t>
             </a:r>
@@ -8248,9 +8248,9 @@
                 <a:solidFill>
                   <a:srgbClr val="FFFFFF"/>
                 </a:solidFill>
-                <a:latin typeface="맑은 고딕"/>
-                <a:ea typeface="맑은 고딕"/>
-                <a:cs typeface="맑은 고딕"/>
+                <a:latin typeface="Noto Sans KR"/>
+                <a:ea typeface="Noto Sans KR"/>
+                <a:cs typeface="Noto Sans KR"/>
               </a:rPr>
               <a:t>유래가 어떻게 되나요? 비건인가요?</a:t>
             </a:r>
@@ -8295,9 +8295,9 @@
                 <a:solidFill>
                   <a:srgbClr val="8FE3C4"/>
                 </a:solidFill>
-                <a:latin typeface="맑은 고딕"/>
-                <a:ea typeface="맑은 고딕"/>
-                <a:cs typeface="맑은 고딕"/>
+                <a:latin typeface="Noto Sans KR"/>
+                <a:ea typeface="Noto Sans KR"/>
+                <a:cs typeface="Noto Sans KR"/>
               </a:rPr>
               <a:t>유래(연어/식물 등)는 원료 규격서 확인 중입니다.</a:t>
             </a:r>
@@ -8319,9 +8319,9 @@
                 <a:solidFill>
                   <a:srgbClr val="8FE3C4"/>
                 </a:solidFill>
-                <a:latin typeface="맑은 고딕"/>
-                <a:ea typeface="맑은 고딕"/>
-                <a:cs typeface="맑은 고딕"/>
+                <a:latin typeface="Noto Sans KR"/>
+                <a:ea typeface="Noto Sans KR"/>
+                <a:cs typeface="Noto Sans KR"/>
               </a:rPr>
               <a:t>확정되면 안내드리겠습니다.</a:t>
             </a:r>
@@ -8513,9 +8513,9 @@
                 <a:solidFill>
                   <a:srgbClr val="FFFFFF"/>
                 </a:solidFill>
-                <a:latin typeface="맑은 고딕"/>
-                <a:ea typeface="맑은 고딕"/>
-                <a:cs typeface="맑은 고딕"/>
+                <a:latin typeface="Noto Sans KR"/>
+                <a:ea typeface="Noto Sans KR"/>
+                <a:cs typeface="Noto Sans KR"/>
               </a:rPr>
               <a:t>민감성 피부도 사용할 수 있나요?</a:t>
             </a:r>
@@ -8560,9 +8560,9 @@
                 <a:solidFill>
                   <a:srgbClr val="8FE3C4"/>
                 </a:solidFill>
-                <a:latin typeface="맑은 고딕"/>
-                <a:ea typeface="맑은 고딕"/>
-                <a:cs typeface="맑은 고딕"/>
+                <a:latin typeface="Noto Sans KR"/>
+                <a:ea typeface="Noto Sans KR"/>
+                <a:cs typeface="Noto Sans KR"/>
               </a:rPr>
               <a:t>저자극 설계이지만, 예민한 피부는 팔 안쪽에</a:t>
             </a:r>
@@ -8584,9 +8584,9 @@
                 <a:solidFill>
                   <a:srgbClr val="8FE3C4"/>
                 </a:solidFill>
-                <a:latin typeface="맑은 고딕"/>
-                <a:ea typeface="맑은 고딕"/>
-                <a:cs typeface="맑은 고딕"/>
+                <a:latin typeface="Noto Sans KR"/>
+                <a:ea typeface="Noto Sans KR"/>
+                <a:cs typeface="Noto Sans KR"/>
               </a:rPr>
               <a:t>패치 테스트 후 사용을 권장합니다.</a:t>
             </a:r>
@@ -8631,9 +8631,9 @@
                 <a:solidFill>
                   <a:srgbClr val="8FA599"/>
                 </a:solidFill>
-                <a:latin typeface="맑은 고딕"/>
-                <a:ea typeface="맑은 고딕"/>
-                <a:cs typeface="맑은 고딕"/>
+                <a:latin typeface="Noto Sans KR"/>
+                <a:ea typeface="Noto Sans KR"/>
+                <a:cs typeface="Noto Sans KR"/>
               </a:rPr>
               <a:t>※ 확정되지 않은 항목은 “확인 중”으로 안내하고 추정 답변을 하지 않습니다. 의약품적 효능·시술 대체 표현은 사용 금지입니다.</a:t>
             </a:r>
@@ -8890,9 +8890,9 @@
                 <a:solidFill>
                   <a:srgbClr val="1C8F55"/>
                 </a:solidFill>
-                <a:latin typeface="맑은 고딕"/>
-                <a:ea typeface="맑은 고딕"/>
-                <a:cs typeface="맑은 고딕"/>
+                <a:latin typeface="Noto Sans KR"/>
+                <a:ea typeface="Noto Sans KR"/>
+                <a:cs typeface="Noto Sans KR"/>
               </a:rPr>
               <a:t>피부 재생 성분 시장의 중심, PDRN</a:t>
             </a:r>
@@ -9118,9 +9118,9 @@
                 <a:solidFill>
                   <a:srgbClr val="142B22"/>
                 </a:solidFill>
-                <a:latin typeface="맑은 고딕"/>
-                <a:ea typeface="맑은 고딕"/>
-                <a:cs typeface="맑은 고딕"/>
+                <a:latin typeface="Noto Sans KR"/>
+                <a:ea typeface="Noto Sans KR"/>
+                <a:cs typeface="Noto Sans KR"/>
               </a:rPr>
               <a:t>시술에서 홈케어로</a:t>
             </a:r>
@@ -9165,9 +9165,9 @@
                 <a:solidFill>
                   <a:srgbClr val="6B7D74"/>
                 </a:solidFill>
-                <a:latin typeface="맑은 고딕"/>
-                <a:ea typeface="맑은 고딕"/>
-                <a:cs typeface="맑은 고딕"/>
+                <a:latin typeface="Noto Sans KR"/>
+                <a:ea typeface="Noto Sans KR"/>
+                <a:cs typeface="Noto Sans KR"/>
               </a:rPr>
               <a:t>재생·리페어 카테고리가 뷰티 시장의</a:t>
             </a:r>
@@ -9189,9 +9189,9 @@
                 <a:solidFill>
                   <a:srgbClr val="6B7D74"/>
                 </a:solidFill>
-                <a:latin typeface="맑은 고딕"/>
-                <a:ea typeface="맑은 고딕"/>
-                <a:cs typeface="맑은 고딕"/>
+                <a:latin typeface="Noto Sans KR"/>
+                <a:ea typeface="Noto Sans KR"/>
+                <a:cs typeface="Noto Sans KR"/>
               </a:rPr>
               <a:t>핵심 축으로 이동</a:t>
             </a:r>
@@ -9213,9 +9213,9 @@
                 <a:solidFill>
                   <a:srgbClr val="6B7D74"/>
                 </a:solidFill>
-                <a:latin typeface="맑은 고딕"/>
-                <a:ea typeface="맑은 고딕"/>
-                <a:cs typeface="맑은 고딕"/>
+                <a:latin typeface="Noto Sans KR"/>
+                <a:ea typeface="Noto Sans KR"/>
+                <a:cs typeface="Noto Sans KR"/>
               </a:rPr>
               <a:t>‘시술 후 홈케어’ 수요 지속 확대</a:t>
             </a:r>
@@ -9397,9 +9397,9 @@
                 <a:solidFill>
                   <a:srgbClr val="142B22"/>
                 </a:solidFill>
-                <a:latin typeface="맑은 고딕"/>
-                <a:ea typeface="맑은 고딕"/>
-                <a:cs typeface="맑은 고딕"/>
+                <a:latin typeface="Noto Sans KR"/>
+                <a:ea typeface="Noto Sans KR"/>
+                <a:cs typeface="Noto Sans KR"/>
               </a:rPr>
               <a:t>성분을 검증하는 소비자</a:t>
             </a:r>
@@ -9444,9 +9444,9 @@
                 <a:solidFill>
                   <a:srgbClr val="6B7D74"/>
                 </a:solidFill>
-                <a:latin typeface="맑은 고딕"/>
-                <a:ea typeface="맑은 고딕"/>
-                <a:cs typeface="맑은 고딕"/>
+                <a:latin typeface="Noto Sans KR"/>
+                <a:ea typeface="Noto Sans KR"/>
+                <a:cs typeface="Noto Sans KR"/>
               </a:rPr>
               <a:t>성분표를 직접 확인하고 비교하는</a:t>
             </a:r>
@@ -9468,9 +9468,9 @@
                 <a:solidFill>
                   <a:srgbClr val="6B7D74"/>
                 </a:solidFill>
-                <a:latin typeface="맑은 고딕"/>
-                <a:ea typeface="맑은 고딕"/>
-                <a:cs typeface="맑은 고딕"/>
+                <a:latin typeface="Noto Sans KR"/>
+                <a:ea typeface="Noto Sans KR"/>
+                <a:cs typeface="Noto Sans KR"/>
               </a:rPr>
               <a:t>성분 리터러시 세대</a:t>
             </a:r>
@@ -9492,9 +9492,9 @@
                 <a:solidFill>
                   <a:srgbClr val="6B7D74"/>
                 </a:solidFill>
-                <a:latin typeface="맑은 고딕"/>
-                <a:ea typeface="맑은 고딕"/>
-                <a:cs typeface="맑은 고딕"/>
+                <a:latin typeface="Noto Sans KR"/>
+                <a:ea typeface="Noto Sans KR"/>
+                <a:cs typeface="Noto Sans KR"/>
               </a:rPr>
               <a:t>‘무엇이 들었는지’가 구매 기준</a:t>
             </a:r>
@@ -9676,9 +9676,9 @@
                 <a:solidFill>
                   <a:srgbClr val="142B22"/>
                 </a:solidFill>
-                <a:latin typeface="맑은 고딕"/>
-                <a:ea typeface="맑은 고딕"/>
-                <a:cs typeface="맑은 고딕"/>
+                <a:latin typeface="Noto Sans KR"/>
+                <a:ea typeface="Noto Sans KR"/>
+                <a:cs typeface="Noto Sans KR"/>
               </a:rPr>
               <a:t>과학으로 증명하는 브랜드</a:t>
             </a:r>
@@ -9723,9 +9723,9 @@
                 <a:solidFill>
                   <a:srgbClr val="6B7D74"/>
                 </a:solidFill>
-                <a:latin typeface="맑은 고딕"/>
-                <a:ea typeface="맑은 고딕"/>
-                <a:cs typeface="맑은 고딕"/>
+                <a:latin typeface="Noto Sans KR"/>
+                <a:ea typeface="Noto Sans KR"/>
+                <a:cs typeface="Noto Sans KR"/>
               </a:rPr>
               <a:t>제약 기반 배합 기술력 +</a:t>
             </a:r>
@@ -9747,9 +9747,9 @@
                 <a:solidFill>
                   <a:srgbClr val="6B7D74"/>
                 </a:solidFill>
-                <a:latin typeface="맑은 고딕"/>
-                <a:ea typeface="맑은 고딕"/>
-                <a:cs typeface="맑은 고딕"/>
+                <a:latin typeface="Noto Sans KR"/>
+                <a:ea typeface="Noto Sans KR"/>
+                <a:cs typeface="Noto Sans KR"/>
               </a:rPr>
               <a:t>PDRN CORE 설계</a:t>
             </a:r>
@@ -9771,9 +9771,9 @@
                 <a:solidFill>
                   <a:srgbClr val="6B7D74"/>
                 </a:solidFill>
-                <a:latin typeface="맑은 고딕"/>
-                <a:ea typeface="맑은 고딕"/>
-                <a:cs typeface="맑은 고딕"/>
+                <a:latin typeface="Noto Sans KR"/>
+                <a:ea typeface="Noto Sans KR"/>
+                <a:cs typeface="Noto Sans KR"/>
               </a:rPr>
               <a:t>클린 사이언티픽 코스메틱 포지셔닝</a:t>
             </a:r>
@@ -9911,9 +9911,9 @@
                 <a:solidFill>
                   <a:srgbClr val="142B22"/>
                 </a:solidFill>
-                <a:latin typeface="맑은 고딕"/>
-                <a:ea typeface="맑은 고딕"/>
-                <a:cs typeface="맑은 고딕"/>
+                <a:latin typeface="Noto Sans KR"/>
+                <a:ea typeface="Noto Sans KR"/>
+                <a:cs typeface="Noto Sans KR"/>
               </a:rPr>
               <a:t>“재생 성분 PDRN을 중심에 두고, 장벽·수분·마이크로바이옴까지 한 번에 잡는 올인원 설계.”</a:t>
             </a:r>
@@ -9958,9 +9958,9 @@
                 <a:solidFill>
                   <a:srgbClr val="6B7D74"/>
                 </a:solidFill>
-                <a:latin typeface="맑은 고딕"/>
-                <a:ea typeface="맑은 고딕"/>
-                <a:cs typeface="맑은 고딕"/>
+                <a:latin typeface="Noto Sans KR"/>
+                <a:ea typeface="Noto Sans KR"/>
+                <a:cs typeface="Noto Sans KR"/>
               </a:rPr>
               <a:t>※ 시장 규모·성장률 등 수치 데이터는 확정된 출처 확인 후 삽입 예정 [DATA TBD]</a:t>
             </a:r>
@@ -10261,9 +10261,9 @@
                 <a:solidFill>
                   <a:srgbClr val="8FE3C4"/>
                 </a:solidFill>
-                <a:latin typeface="맑은 고딕"/>
-                <a:ea typeface="맑은 고딕"/>
-                <a:cs typeface="맑은 고딕"/>
+                <a:latin typeface="Noto Sans KR"/>
+                <a:ea typeface="Noto Sans KR"/>
+                <a:cs typeface="Noto Sans KR"/>
               </a:rPr>
               <a:t>폴리데옥시리보뉴클레오타이드 — 자연 유래 DNA 단편 복합체</a:t>
             </a:r>
@@ -10423,9 +10423,9 @@
                 <a:solidFill>
                   <a:srgbClr val="FFFFFF"/>
                 </a:solidFill>
-                <a:latin typeface="맑은 고딕"/>
-                <a:ea typeface="맑은 고딕"/>
-                <a:cs typeface="맑은 고딕"/>
+                <a:latin typeface="Noto Sans KR"/>
+                <a:ea typeface="Noto Sans KR"/>
+                <a:cs typeface="Noto Sans KR"/>
               </a:rPr>
               <a:t>PDRN은 살아 있는 세포에서 추출한</a:t>
             </a:r>
@@ -10447,9 +10447,9 @@
                 <a:solidFill>
                   <a:srgbClr val="FFFFFF"/>
                 </a:solidFill>
-                <a:latin typeface="맑은 고딕"/>
-                <a:ea typeface="맑은 고딕"/>
-                <a:cs typeface="맑은 고딕"/>
+                <a:latin typeface="Noto Sans KR"/>
+                <a:ea typeface="Noto Sans KR"/>
+                <a:cs typeface="Noto Sans KR"/>
               </a:rPr>
               <a:t>저분자 DNA 단편의 혼합물로,</a:t>
             </a:r>
@@ -10471,9 +10471,9 @@
                 <a:solidFill>
                   <a:srgbClr val="FFFFFF"/>
                 </a:solidFill>
-                <a:latin typeface="맑은 고딕"/>
-                <a:ea typeface="맑은 고딕"/>
-                <a:cs typeface="맑은 고딕"/>
+                <a:latin typeface="Noto Sans KR"/>
+                <a:ea typeface="Noto Sans KR"/>
+                <a:cs typeface="Noto Sans KR"/>
               </a:rPr>
               <a:t>피부가 스스로 회복하는 과정에</a:t>
             </a:r>
@@ -10495,9 +10495,9 @@
                 <a:solidFill>
                   <a:srgbClr val="FFFFFF"/>
                 </a:solidFill>
-                <a:latin typeface="맑은 고딕"/>
-                <a:ea typeface="맑은 고딕"/>
-                <a:cs typeface="맑은 고딕"/>
+                <a:latin typeface="Noto Sans KR"/>
+                <a:ea typeface="Noto Sans KR"/>
+                <a:cs typeface="Noto Sans KR"/>
               </a:rPr>
               <a:t>필요한 뉴클레오타이드를 공급합니다.</a:t>
             </a:r>
@@ -10586,9 +10586,9 @@
                 <a:solidFill>
                   <a:srgbClr val="8FE3C4"/>
                 </a:solidFill>
-                <a:latin typeface="맑은 고딕"/>
-                <a:ea typeface="맑은 고딕"/>
-                <a:cs typeface="맑은 고딕"/>
+                <a:latin typeface="Noto Sans KR"/>
+                <a:ea typeface="Noto Sans KR"/>
+                <a:cs typeface="Noto Sans KR"/>
               </a:rPr>
               <a:t>정의</a:t>
             </a:r>
@@ -10633,9 +10633,9 @@
                 <a:solidFill>
                   <a:srgbClr val="FFFFFF"/>
                 </a:solidFill>
-                <a:latin typeface="맑은 고딕"/>
-                <a:ea typeface="맑은 고딕"/>
-                <a:cs typeface="맑은 고딕"/>
+                <a:latin typeface="Noto Sans KR"/>
+                <a:ea typeface="Noto Sans KR"/>
+                <a:cs typeface="Noto Sans KR"/>
               </a:rPr>
               <a:t>Polydeoxyribonucleotide</a:t>
             </a:r>
@@ -10680,9 +10680,9 @@
                 <a:solidFill>
                   <a:srgbClr val="8FA599"/>
                 </a:solidFill>
-                <a:latin typeface="맑은 고딕"/>
-                <a:ea typeface="맑은 고딕"/>
-                <a:cs typeface="맑은 고딕"/>
+                <a:latin typeface="Noto Sans KR"/>
+                <a:ea typeface="Noto Sans KR"/>
+                <a:cs typeface="Noto Sans KR"/>
               </a:rPr>
               <a:t>저분자 DNA 단편 복합체</a:t>
             </a:r>
@@ -10771,9 +10771,9 @@
                 <a:solidFill>
                   <a:srgbClr val="8FE3C4"/>
                 </a:solidFill>
-                <a:latin typeface="맑은 고딕"/>
-                <a:ea typeface="맑은 고딕"/>
-                <a:cs typeface="맑은 고딕"/>
+                <a:latin typeface="Noto Sans KR"/>
+                <a:ea typeface="Noto Sans KR"/>
+                <a:cs typeface="Noto Sans KR"/>
               </a:rPr>
               <a:t>구성</a:t>
             </a:r>
@@ -10818,9 +10818,9 @@
                 <a:solidFill>
                   <a:srgbClr val="FFFFFF"/>
                 </a:solidFill>
-                <a:latin typeface="맑은 고딕"/>
-                <a:ea typeface="맑은 고딕"/>
-                <a:cs typeface="맑은 고딕"/>
+                <a:latin typeface="Noto Sans KR"/>
+                <a:ea typeface="Noto Sans KR"/>
+                <a:cs typeface="Noto Sans KR"/>
               </a:rPr>
               <a:t>Nucleotide / Nucleoside</a:t>
             </a:r>
@@ -10865,9 +10865,9 @@
                 <a:solidFill>
                   <a:srgbClr val="8FA599"/>
                 </a:solidFill>
-                <a:latin typeface="맑은 고딕"/>
-                <a:ea typeface="맑은 고딕"/>
-                <a:cs typeface="맑은 고딕"/>
+                <a:latin typeface="Noto Sans KR"/>
+                <a:ea typeface="Noto Sans KR"/>
+                <a:cs typeface="Noto Sans KR"/>
               </a:rPr>
               <a:t>아데노신 등 활성 단위 포함</a:t>
             </a:r>
@@ -10956,9 +10956,9 @@
                 <a:solidFill>
                   <a:srgbClr val="8FE3C4"/>
                 </a:solidFill>
-                <a:latin typeface="맑은 고딕"/>
-                <a:ea typeface="맑은 고딕"/>
-                <a:cs typeface="맑은 고딕"/>
+                <a:latin typeface="Noto Sans KR"/>
+                <a:ea typeface="Noto Sans KR"/>
+                <a:cs typeface="Noto Sans KR"/>
               </a:rPr>
               <a:t>유래</a:t>
             </a:r>
@@ -11003,9 +11003,9 @@
                 <a:solidFill>
                   <a:srgbClr val="FFFFFF"/>
                 </a:solidFill>
-                <a:latin typeface="맑은 고딕"/>
-                <a:ea typeface="맑은 고딕"/>
-                <a:cs typeface="맑은 고딕"/>
+                <a:latin typeface="Noto Sans KR"/>
+                <a:ea typeface="Noto Sans KR"/>
+                <a:cs typeface="Noto Sans KR"/>
               </a:rPr>
               <a:t>[확인 중]</a:t>
             </a:r>
@@ -11050,9 +11050,9 @@
                 <a:solidFill>
                   <a:srgbClr val="8FA599"/>
                 </a:solidFill>
-                <a:latin typeface="맑은 고딕"/>
-                <a:ea typeface="맑은 고딕"/>
-                <a:cs typeface="맑은 고딕"/>
+                <a:latin typeface="Noto Sans KR"/>
+                <a:ea typeface="Noto Sans KR"/>
+                <a:cs typeface="Noto Sans KR"/>
               </a:rPr>
               <a:t>원료 규격서 확인 후 확정</a:t>
             </a:r>
@@ -11141,9 +11141,9 @@
                 <a:solidFill>
                   <a:srgbClr val="8FE3C4"/>
                 </a:solidFill>
-                <a:latin typeface="맑은 고딕"/>
-                <a:ea typeface="맑은 고딕"/>
-                <a:cs typeface="맑은 고딕"/>
+                <a:latin typeface="Noto Sans KR"/>
+                <a:ea typeface="Noto Sans KR"/>
+                <a:cs typeface="Noto Sans KR"/>
               </a:rPr>
               <a:t>특징</a:t>
             </a:r>
@@ -11188,9 +11188,9 @@
                 <a:solidFill>
                   <a:srgbClr val="FFFFFF"/>
                 </a:solidFill>
-                <a:latin typeface="맑은 고딕"/>
-                <a:ea typeface="맑은 고딕"/>
-                <a:cs typeface="맑은 고딕"/>
+                <a:latin typeface="Noto Sans KR"/>
+                <a:ea typeface="Noto Sans KR"/>
+                <a:cs typeface="Noto Sans KR"/>
               </a:rPr>
               <a:t>저자극 · 고안정 뉴클레오타이드</a:t>
             </a:r>
@@ -11235,9 +11235,9 @@
                 <a:solidFill>
                   <a:srgbClr val="8FA599"/>
                 </a:solidFill>
-                <a:latin typeface="맑은 고딕"/>
-                <a:ea typeface="맑은 고딕"/>
-                <a:cs typeface="맑은 고딕"/>
+                <a:latin typeface="Noto Sans KR"/>
+                <a:ea typeface="Noto Sans KR"/>
+                <a:cs typeface="Noto Sans KR"/>
               </a:rPr>
               <a:t>장기 사용에 적합한 프로파일</a:t>
             </a:r>
@@ -11282,9 +11282,9 @@
                 <a:solidFill>
                   <a:srgbClr val="8FA599"/>
                 </a:solidFill>
-                <a:latin typeface="맑은 고딕"/>
-                <a:ea typeface="맑은 고딕"/>
-                <a:cs typeface="맑은 고딕"/>
+                <a:latin typeface="Noto Sans KR"/>
+                <a:ea typeface="Noto Sans KR"/>
+                <a:cs typeface="Noto Sans KR"/>
               </a:rPr>
               <a:t>※ PDRN의 전성분 표기명은 소듐디엔에이(Sodium DNA)입니다.</a:t>
             </a:r>
@@ -11541,9 +11541,9 @@
                 <a:solidFill>
                   <a:srgbClr val="8FE3C4"/>
                 </a:solidFill>
-                <a:latin typeface="맑은 고딕"/>
-                <a:ea typeface="맑은 고딕"/>
-                <a:cs typeface="맑은 고딕"/>
+                <a:latin typeface="Noto Sans KR"/>
+                <a:ea typeface="Noto Sans KR"/>
+                <a:cs typeface="Noto Sans KR"/>
               </a:rPr>
               <a:t>A2A 수용체를 통한 4가지 작용 메커니즘 (원료 학술자료 기준)</a:t>
             </a:r>
@@ -11658,9 +11658,9 @@
                 <a:solidFill>
                   <a:srgbClr val="8FA599"/>
                 </a:solidFill>
-                <a:latin typeface="맑은 고딕"/>
-                <a:ea typeface="맑은 고딕"/>
-                <a:cs typeface="맑은 고딕"/>
+                <a:latin typeface="Noto Sans KR"/>
+                <a:ea typeface="Noto Sans KR"/>
+                <a:cs typeface="Noto Sans KR"/>
               </a:rPr>
               <a:t>PDRN 작용 기전 도판 — 원료 학술자료 기준</a:t>
             </a:r>
@@ -11843,9 +11843,9 @@
                 <a:solidFill>
                   <a:srgbClr val="FFFFFF"/>
                 </a:solidFill>
-                <a:latin typeface="맑은 고딕"/>
-                <a:ea typeface="맑은 고딕"/>
-                <a:cs typeface="맑은 고딕"/>
+                <a:latin typeface="Noto Sans KR"/>
+                <a:ea typeface="Noto Sans KR"/>
+                <a:cs typeface="Noto Sans KR"/>
               </a:rPr>
               <a:t>항염 밸런싱</a:t>
             </a:r>
@@ -11890,9 +11890,9 @@
                 <a:solidFill>
                   <a:srgbClr val="8FE3C4"/>
                 </a:solidFill>
-                <a:latin typeface="맑은 고딕"/>
-                <a:ea typeface="맑은 고딕"/>
-                <a:cs typeface="맑은 고딕"/>
+                <a:latin typeface="Noto Sans KR"/>
+                <a:ea typeface="Noto Sans KR"/>
+                <a:cs typeface="Noto Sans KR"/>
               </a:rPr>
               <a:t>TNF-α·IL-6 신호는 낮추고 IL-10 활성은 높이는 방향</a:t>
             </a:r>
@@ -12028,9 +12028,9 @@
                 <a:solidFill>
                   <a:srgbClr val="FFFFFF"/>
                 </a:solidFill>
-                <a:latin typeface="맑은 고딕"/>
-                <a:ea typeface="맑은 고딕"/>
-                <a:cs typeface="맑은 고딕"/>
+                <a:latin typeface="Noto Sans KR"/>
+                <a:ea typeface="Noto Sans KR"/>
+                <a:cs typeface="Noto Sans KR"/>
               </a:rPr>
               <a:t>혈관 확장 · 순환</a:t>
             </a:r>
@@ -12075,9 +12075,9 @@
                 <a:solidFill>
                   <a:srgbClr val="8FE3C4"/>
                 </a:solidFill>
-                <a:latin typeface="맑은 고딕"/>
-                <a:ea typeface="맑은 고딕"/>
-                <a:cs typeface="맑은 고딕"/>
+                <a:latin typeface="Noto Sans KR"/>
+                <a:ea typeface="Noto Sans KR"/>
+                <a:cs typeface="Noto Sans KR"/>
               </a:rPr>
               <a:t>VEGF 분비 촉진으로 미세순환·영양 공급 경로 활성</a:t>
             </a:r>
@@ -12213,9 +12213,9 @@
                 <a:solidFill>
                   <a:srgbClr val="FFFFFF"/>
                 </a:solidFill>
-                <a:latin typeface="맑은 고딕"/>
-                <a:ea typeface="맑은 고딕"/>
-                <a:cs typeface="맑은 고딕"/>
+                <a:latin typeface="Noto Sans KR"/>
+                <a:ea typeface="Noto Sans KR"/>
+                <a:cs typeface="Noto Sans KR"/>
               </a:rPr>
               <a:t>성장인자 시너지</a:t>
             </a:r>
@@ -12260,9 +12260,9 @@
                 <a:solidFill>
                   <a:srgbClr val="8FE3C4"/>
                 </a:solidFill>
-                <a:latin typeface="맑은 고딕"/>
-                <a:ea typeface="맑은 고딕"/>
-                <a:cs typeface="맑은 고딕"/>
+                <a:latin typeface="Noto Sans KR"/>
+                <a:ea typeface="Noto Sans KR"/>
+                <a:cs typeface="Noto Sans KR"/>
               </a:rPr>
               <a:t>EGF·FGF·IGF 분비를 도와 피부 세포 활동 뒷받침</a:t>
             </a:r>
@@ -12398,9 +12398,9 @@
                 <a:solidFill>
                   <a:srgbClr val="FFFFFF"/>
                 </a:solidFill>
-                <a:latin typeface="맑은 고딕"/>
-                <a:ea typeface="맑은 고딕"/>
-                <a:cs typeface="맑은 고딕"/>
+                <a:latin typeface="Noto Sans KR"/>
+                <a:ea typeface="Noto Sans KR"/>
+                <a:cs typeface="Noto Sans KR"/>
               </a:rPr>
               <a:t>DNA 합성 살베이지</a:t>
             </a:r>
@@ -12445,9 +12445,9 @@
                 <a:solidFill>
                   <a:srgbClr val="8FE3C4"/>
                 </a:solidFill>
-                <a:latin typeface="맑은 고딕"/>
-                <a:ea typeface="맑은 고딕"/>
-                <a:cs typeface="맑은 고딕"/>
+                <a:latin typeface="Noto Sans KR"/>
+                <a:ea typeface="Noto Sans KR"/>
+                <a:cs typeface="Noto Sans KR"/>
               </a:rPr>
               <a:t>우회 경로 활성화로 적은 에너지로 세포 재생 유도</a:t>
             </a:r>
@@ -12492,9 +12492,9 @@
                 <a:solidFill>
                   <a:srgbClr val="8FA599"/>
                 </a:solidFill>
-                <a:latin typeface="맑은 고딕"/>
-                <a:ea typeface="맑은 고딕"/>
-                <a:cs typeface="맑은 고딕"/>
+                <a:latin typeface="Noto Sans KR"/>
+                <a:ea typeface="Noto Sans KR"/>
+                <a:cs typeface="Noto Sans KR"/>
               </a:rPr>
               <a:t>※ 상기 내용은 PDRN 원료에 대한 일반 학술자료를 요약한 설명으로, 완제품의 의학적 효능·효과를 의미하지 않습니다.</a:t>
             </a:r>
@@ -12751,9 +12751,9 @@
                 <a:solidFill>
                   <a:srgbClr val="1C8F55"/>
                 </a:solidFill>
-                <a:latin typeface="맑은 고딕"/>
-                <a:ea typeface="맑은 고딕"/>
-                <a:cs typeface="맑은 고딕"/>
+                <a:latin typeface="Noto Sans KR"/>
+                <a:ea typeface="Noto Sans KR"/>
+                <a:cs typeface="Noto Sans KR"/>
               </a:rPr>
               <a:t>PDRN CORE 설계가 향하는 피부 변화</a:t>
             </a:r>
@@ -12898,9 +12898,9 @@
                 <a:solidFill>
                   <a:srgbClr val="FFFFFF"/>
                 </a:solidFill>
-                <a:latin typeface="맑은 고딕"/>
-                <a:ea typeface="맑은 고딕"/>
-                <a:cs typeface="맑은 고딕"/>
+                <a:latin typeface="Noto Sans KR"/>
+                <a:ea typeface="Noto Sans KR"/>
+                <a:cs typeface="Noto Sans KR"/>
               </a:rPr>
               <a:t>진정</a:t>
             </a:r>
@@ -12945,9 +12945,9 @@
                 <a:solidFill>
                   <a:srgbClr val="142B22"/>
                 </a:solidFill>
-                <a:latin typeface="맑은 고딕"/>
-                <a:ea typeface="맑은 고딕"/>
-                <a:cs typeface="맑은 고딕"/>
+                <a:latin typeface="Noto Sans KR"/>
+                <a:ea typeface="Noto Sans KR"/>
+                <a:cs typeface="Noto Sans KR"/>
               </a:rPr>
               <a:t>예민해진 피부를 편안하게</a:t>
             </a:r>
@@ -12992,9 +12992,9 @@
                 <a:solidFill>
                   <a:srgbClr val="6B7D74"/>
                 </a:solidFill>
-                <a:latin typeface="맑은 고딕"/>
-                <a:ea typeface="맑은 고딕"/>
-                <a:cs typeface="맑은 고딕"/>
+                <a:latin typeface="Noto Sans KR"/>
+                <a:ea typeface="Noto Sans KR"/>
+                <a:cs typeface="Noto Sans KR"/>
               </a:rPr>
               <a:t>자극 후 붉은 기와 당김을 진정시키는 저자극 설계</a:t>
             </a:r>
@@ -13095,9 +13095,9 @@
                 <a:solidFill>
                   <a:srgbClr val="FFFFFF"/>
                 </a:solidFill>
-                <a:latin typeface="맑은 고딕"/>
-                <a:ea typeface="맑은 고딕"/>
-                <a:cs typeface="맑은 고딕"/>
+                <a:latin typeface="Noto Sans KR"/>
+                <a:ea typeface="Noto Sans KR"/>
+                <a:cs typeface="Noto Sans KR"/>
               </a:rPr>
               <a:t>장벽</a:t>
             </a:r>
@@ -13142,9 +13142,9 @@
                 <a:solidFill>
                   <a:srgbClr val="142B22"/>
                 </a:solidFill>
-                <a:latin typeface="맑은 고딕"/>
-                <a:ea typeface="맑은 고딕"/>
-                <a:cs typeface="맑은 고딕"/>
+                <a:latin typeface="Noto Sans KR"/>
+                <a:ea typeface="Noto Sans KR"/>
+                <a:cs typeface="Noto Sans KR"/>
               </a:rPr>
               <a:t>속부터 단단해지는 피부</a:t>
             </a:r>
@@ -13189,9 +13189,9 @@
                 <a:solidFill>
                   <a:srgbClr val="6B7D74"/>
                 </a:solidFill>
-                <a:latin typeface="맑은 고딕"/>
-                <a:ea typeface="맑은 고딕"/>
-                <a:cs typeface="맑은 고딕"/>
+                <a:latin typeface="Noto Sans KR"/>
+                <a:ea typeface="Noto Sans KR"/>
+                <a:cs typeface="Noto Sans KR"/>
               </a:rPr>
               <a:t>세라마이드 복합체와 함께 무너진 장벽을 채워줌</a:t>
             </a:r>
@@ -13292,9 +13292,9 @@
                 <a:solidFill>
                   <a:srgbClr val="FFFFFF"/>
                 </a:solidFill>
-                <a:latin typeface="맑은 고딕"/>
-                <a:ea typeface="맑은 고딕"/>
-                <a:cs typeface="맑은 고딕"/>
+                <a:latin typeface="Noto Sans KR"/>
+                <a:ea typeface="Noto Sans KR"/>
+                <a:cs typeface="Noto Sans KR"/>
               </a:rPr>
               <a:t>탄력</a:t>
             </a:r>
@@ -13339,9 +13339,9 @@
                 <a:solidFill>
                   <a:srgbClr val="142B22"/>
                 </a:solidFill>
-                <a:latin typeface="맑은 고딕"/>
-                <a:ea typeface="맑은 고딕"/>
-                <a:cs typeface="맑은 고딕"/>
+                <a:latin typeface="Noto Sans KR"/>
+                <a:ea typeface="Noto Sans KR"/>
+                <a:cs typeface="Noto Sans KR"/>
               </a:rPr>
               <a:t>밀도가 느껴지는 피부결</a:t>
             </a:r>
@@ -13386,9 +13386,9 @@
                 <a:solidFill>
                   <a:srgbClr val="6B7D74"/>
                 </a:solidFill>
-                <a:latin typeface="맑은 고딕"/>
-                <a:ea typeface="맑은 고딕"/>
-                <a:cs typeface="맑은 고딕"/>
+                <a:latin typeface="Noto Sans KR"/>
+                <a:ea typeface="Noto Sans KR"/>
+                <a:cs typeface="Noto Sans KR"/>
               </a:rPr>
               <a:t>5GF 나노좀과의 조합으로 탄탄한 볼륨감 서포트</a:t>
             </a:r>
@@ -13489,9 +13489,9 @@
                 <a:solidFill>
                   <a:srgbClr val="FFFFFF"/>
                 </a:solidFill>
-                <a:latin typeface="맑은 고딕"/>
-                <a:ea typeface="맑은 고딕"/>
-                <a:cs typeface="맑은 고딕"/>
+                <a:latin typeface="Noto Sans KR"/>
+                <a:ea typeface="Noto Sans KR"/>
+                <a:cs typeface="Noto Sans KR"/>
               </a:rPr>
               <a:t>수분</a:t>
             </a:r>
@@ -13536,9 +13536,9 @@
                 <a:solidFill>
                   <a:srgbClr val="142B22"/>
                 </a:solidFill>
-                <a:latin typeface="맑은 고딕"/>
-                <a:ea typeface="맑은 고딕"/>
-                <a:cs typeface="맑은 고딕"/>
+                <a:latin typeface="Noto Sans KR"/>
+                <a:ea typeface="Noto Sans KR"/>
+                <a:cs typeface="Noto Sans KR"/>
               </a:rPr>
               <a:t>속건조 없는 촉촉함</a:t>
             </a:r>
@@ -13583,9 +13583,9 @@
                 <a:solidFill>
                   <a:srgbClr val="6B7D74"/>
                 </a:solidFill>
-                <a:latin typeface="맑은 고딕"/>
-                <a:ea typeface="맑은 고딕"/>
-                <a:cs typeface="맑은 고딕"/>
+                <a:latin typeface="Noto Sans KR"/>
+                <a:ea typeface="Noto Sans KR"/>
+                <a:cs typeface="Noto Sans KR"/>
               </a:rPr>
               <a:t>8중 히알루론산으로 층층이 수분 레이어링</a:t>
             </a:r>
@@ -13686,9 +13686,9 @@
                 <a:solidFill>
                   <a:srgbClr val="FFFFFF"/>
                 </a:solidFill>
-                <a:latin typeface="맑은 고딕"/>
-                <a:ea typeface="맑은 고딕"/>
-                <a:cs typeface="맑은 고딕"/>
+                <a:latin typeface="Noto Sans KR"/>
+                <a:ea typeface="Noto Sans KR"/>
+                <a:cs typeface="Noto Sans KR"/>
               </a:rPr>
               <a:t>밸런스</a:t>
             </a:r>
@@ -13733,9 +13733,9 @@
                 <a:solidFill>
                   <a:srgbClr val="142B22"/>
                 </a:solidFill>
-                <a:latin typeface="맑은 고딕"/>
-                <a:ea typeface="맑은 고딕"/>
-                <a:cs typeface="맑은 고딕"/>
+                <a:latin typeface="Noto Sans KR"/>
+                <a:ea typeface="Noto Sans KR"/>
+                <a:cs typeface="Noto Sans KR"/>
               </a:rPr>
               <a:t>건강한 피부 환경 유지</a:t>
             </a:r>
@@ -13780,9 +13780,9 @@
                 <a:solidFill>
                   <a:srgbClr val="6B7D74"/>
                 </a:solidFill>
-                <a:latin typeface="맑은 고딕"/>
-                <a:ea typeface="맑은 고딕"/>
-                <a:cs typeface="맑은 고딕"/>
+                <a:latin typeface="Noto Sans KR"/>
+                <a:ea typeface="Noto Sans KR"/>
+                <a:cs typeface="Noto Sans KR"/>
               </a:rPr>
               <a:t>마이크로바이옴 3종으로 유익균 밸런스 관리</a:t>
             </a:r>
@@ -13827,9 +13827,9 @@
                 <a:solidFill>
                   <a:srgbClr val="6B7D74"/>
                 </a:solidFill>
-                <a:latin typeface="맑은 고딕"/>
-                <a:ea typeface="맑은 고딕"/>
-                <a:cs typeface="맑은 고딕"/>
+                <a:latin typeface="Noto Sans KR"/>
+                <a:ea typeface="Noto Sans KR"/>
+                <a:cs typeface="Noto Sans KR"/>
               </a:rPr>
               <a:t>※ 화장품 표시·광고 범위 내 표현입니다. 의약품적 효능(치료·재생 등) 표현은 사용하지 않습니다.</a:t>
             </a:r>
@@ -14132,9 +14132,9 @@
                 <a:solidFill>
                   <a:srgbClr val="8FE3C4"/>
                 </a:solidFill>
-                <a:latin typeface="맑은 고딕"/>
-                <a:ea typeface="맑은 고딕"/>
-                <a:cs typeface="맑은 고딕"/>
+                <a:latin typeface="Noto Sans KR"/>
+                <a:ea typeface="Noto Sans KR"/>
+                <a:cs typeface="Noto Sans KR"/>
               </a:rPr>
               <a:t>PDRN을 중심에 둔 골든 레이시오 배합 구조</a:t>
             </a:r>
@@ -14294,9 +14294,9 @@
                 <a:solidFill>
                   <a:srgbClr val="FFFFFF"/>
                 </a:solidFill>
-                <a:latin typeface="맑은 고딕"/>
-                <a:ea typeface="맑은 고딕"/>
-                <a:cs typeface="맑은 고딕"/>
+                <a:latin typeface="Noto Sans KR"/>
+                <a:ea typeface="Noto Sans KR"/>
+                <a:cs typeface="Noto Sans KR"/>
               </a:rPr>
               <a:t>재생 시그널의 중심</a:t>
             </a:r>
@@ -14478,9 +14478,9 @@
                 <a:solidFill>
                   <a:srgbClr val="FFFFFF"/>
                 </a:solidFill>
-                <a:latin typeface="맑은 고딕"/>
-                <a:ea typeface="맑은 고딕"/>
-                <a:cs typeface="맑은 고딕"/>
+                <a:latin typeface="Noto Sans KR"/>
+                <a:ea typeface="Noto Sans KR"/>
+                <a:cs typeface="Noto Sans KR"/>
               </a:rPr>
               <a:t>성장인자 5종</a:t>
             </a:r>
@@ -14525,9 +14525,9 @@
                 <a:solidFill>
                   <a:srgbClr val="8FA599"/>
                 </a:solidFill>
-                <a:latin typeface="맑은 고딕"/>
-                <a:ea typeface="맑은 고딕"/>
-                <a:cs typeface="맑은 고딕"/>
+                <a:latin typeface="Noto Sans KR"/>
+                <a:ea typeface="Noto Sans KR"/>
+                <a:cs typeface="Noto Sans KR"/>
               </a:rPr>
               <a:t>sh-Oligopeptide-1·2 / sh-Polypeptide-1·3·16</a:t>
             </a:r>
@@ -14755,9 +14755,9 @@
                 <a:solidFill>
                   <a:srgbClr val="FFFFFF"/>
                 </a:solidFill>
-                <a:latin typeface="맑은 고딕"/>
-                <a:ea typeface="맑은 고딕"/>
-                <a:cs typeface="맑은 고딕"/>
+                <a:latin typeface="Noto Sans KR"/>
+                <a:ea typeface="Noto Sans KR"/>
+                <a:cs typeface="Noto Sans KR"/>
               </a:rPr>
               <a:t>8중 히알루론산</a:t>
             </a:r>
@@ -14802,9 +14802,9 @@
                 <a:solidFill>
                   <a:srgbClr val="8FA599"/>
                 </a:solidFill>
-                <a:latin typeface="맑은 고딕"/>
-                <a:ea typeface="맑은 고딕"/>
-                <a:cs typeface="맑은 고딕"/>
+                <a:latin typeface="Noto Sans KR"/>
+                <a:ea typeface="Noto Sans KR"/>
+                <a:cs typeface="Noto Sans KR"/>
               </a:rPr>
               <a:t>저분자~고분자 수분 레이어링</a:t>
             </a:r>
@@ -15032,9 +15032,9 @@
                 <a:solidFill>
                   <a:srgbClr val="FFFFFF"/>
                 </a:solidFill>
-                <a:latin typeface="맑은 고딕"/>
-                <a:ea typeface="맑은 고딕"/>
-                <a:cs typeface="맑은 고딕"/>
+                <a:latin typeface="Noto Sans KR"/>
+                <a:ea typeface="Noto Sans KR"/>
+                <a:cs typeface="Noto Sans KR"/>
               </a:rPr>
               <a:t>복합 세라마이드 NP</a:t>
             </a:r>
@@ -15079,9 +15079,9 @@
                 <a:solidFill>
                   <a:srgbClr val="8FA599"/>
                 </a:solidFill>
-                <a:latin typeface="맑은 고딕"/>
-                <a:ea typeface="맑은 고딕"/>
-                <a:cs typeface="맑은 고딕"/>
+                <a:latin typeface="Noto Sans KR"/>
+                <a:ea typeface="Noto Sans KR"/>
+                <a:cs typeface="Noto Sans KR"/>
               </a:rPr>
               <a:t>AS·NS·AP·EOP·NG·EOS 장벽 강화</a:t>
             </a:r>
@@ -15309,9 +15309,9 @@
                 <a:solidFill>
                   <a:srgbClr val="FFFFFF"/>
                 </a:solidFill>
-                <a:latin typeface="맑은 고딕"/>
-                <a:ea typeface="맑은 고딕"/>
-                <a:cs typeface="맑은 고딕"/>
+                <a:latin typeface="Noto Sans KR"/>
+                <a:ea typeface="Noto Sans KR"/>
+                <a:cs typeface="Noto Sans KR"/>
               </a:rPr>
               <a:t>마이크로바이옴 3종</a:t>
             </a:r>
@@ -15356,9 +15356,9 @@
                 <a:solidFill>
                   <a:srgbClr val="8FA599"/>
                 </a:solidFill>
-                <a:latin typeface="맑은 고딕"/>
-                <a:ea typeface="맑은 고딕"/>
-                <a:cs typeface="맑은 고딕"/>
+                <a:latin typeface="Noto Sans KR"/>
+                <a:ea typeface="Noto Sans KR"/>
+                <a:cs typeface="Noto Sans KR"/>
               </a:rPr>
               <a:t>비피다·락토바실러스·스트렙토코쿠스 발효</a:t>
             </a:r>
@@ -15586,9 +15586,9 @@
                 <a:solidFill>
                   <a:srgbClr val="FFFFFF"/>
                 </a:solidFill>
-                <a:latin typeface="맑은 고딕"/>
-                <a:ea typeface="맑은 고딕"/>
-                <a:cs typeface="맑은 고딕"/>
+                <a:latin typeface="Noto Sans KR"/>
+                <a:ea typeface="Noto Sans KR"/>
+                <a:cs typeface="Noto Sans KR"/>
               </a:rPr>
               <a:t>식물줄기세포 배양액 5종</a:t>
             </a:r>
@@ -15633,9 +15633,9 @@
                 <a:solidFill>
                   <a:srgbClr val="8FA599"/>
                 </a:solidFill>
-                <a:latin typeface="맑은 고딕"/>
-                <a:ea typeface="맑은 고딕"/>
-                <a:cs typeface="맑은 고딕"/>
+                <a:latin typeface="Noto Sans KR"/>
+                <a:ea typeface="Noto Sans KR"/>
+                <a:cs typeface="Noto Sans KR"/>
               </a:rPr>
               <a:t>캘러스 배양 추출물 기반 활력 부여</a:t>
             </a:r>
@@ -15863,9 +15863,9 @@
                 <a:solidFill>
                   <a:srgbClr val="FFFFFF"/>
                 </a:solidFill>
-                <a:latin typeface="맑은 고딕"/>
-                <a:ea typeface="맑은 고딕"/>
-                <a:cs typeface="맑은 고딕"/>
+                <a:latin typeface="Noto Sans KR"/>
+                <a:ea typeface="Noto Sans KR"/>
+                <a:cs typeface="Noto Sans KR"/>
               </a:rPr>
               <a:t>펩타이드 5종</a:t>
             </a:r>
@@ -15910,9 +15910,9 @@
                 <a:solidFill>
                   <a:srgbClr val="8FA599"/>
                 </a:solidFill>
-                <a:latin typeface="맑은 고딕"/>
-                <a:ea typeface="맑은 고딕"/>
-                <a:cs typeface="맑은 고딕"/>
+                <a:latin typeface="Noto Sans KR"/>
+                <a:ea typeface="Noto Sans KR"/>
+                <a:cs typeface="Noto Sans KR"/>
               </a:rPr>
               <a:t>피부 구성 단백질 유사 구조로 탄력 서포트</a:t>
             </a:r>
@@ -16050,9 +16050,9 @@
                 <a:solidFill>
                   <a:srgbClr val="8FA599"/>
                 </a:solidFill>
-                <a:latin typeface="맑은 고딕"/>
-                <a:ea typeface="맑은 고딕"/>
-                <a:cs typeface="맑은 고딕"/>
+                <a:latin typeface="Noto Sans KR"/>
+                <a:ea typeface="Noto Sans KR"/>
+                <a:cs typeface="Noto Sans KR"/>
               </a:rPr>
               <a:t>※ PDRN 전성분 표기명: 소듐디엔에이(Sodium DNA). 함량은 제조사 확인 후 표기 예정.</a:t>
             </a:r>
@@ -16309,9 +16309,9 @@
                 <a:solidFill>
                   <a:srgbClr val="1C8F55"/>
                 </a:solidFill>
-                <a:latin typeface="맑은 고딕"/>
-                <a:ea typeface="맑은 고딕"/>
-                <a:cs typeface="맑은 고딕"/>
+                <a:latin typeface="Noto Sans KR"/>
+                <a:ea typeface="Noto Sans KR"/>
+                <a:cs typeface="Noto Sans KR"/>
               </a:rPr>
               <a:t>PDRN이 켜고, 6가지 콤플렉스가 완성하는 4단계 케어</a:t>
             </a:r>
@@ -16628,9 +16628,9 @@
                 <a:solidFill>
                   <a:srgbClr val="1C8F55"/>
                 </a:solidFill>
-                <a:latin typeface="맑은 고딕"/>
-                <a:ea typeface="맑은 고딕"/>
-                <a:cs typeface="맑은 고딕"/>
+                <a:latin typeface="Noto Sans KR"/>
+                <a:ea typeface="Noto Sans KR"/>
+                <a:cs typeface="Noto Sans KR"/>
               </a:rPr>
               <a:t>PDRN CORE</a:t>
             </a:r>
@@ -16675,9 +16675,9 @@
                 <a:solidFill>
                   <a:srgbClr val="6B7D74"/>
                 </a:solidFill>
-                <a:latin typeface="맑은 고딕"/>
-                <a:ea typeface="맑은 고딕"/>
-                <a:cs typeface="맑은 고딕"/>
+                <a:latin typeface="Noto Sans KR"/>
+                <a:ea typeface="Noto Sans KR"/>
+                <a:cs typeface="Noto Sans KR"/>
               </a:rPr>
               <a:t>재생 시그널을 깨우는</a:t>
             </a:r>
@@ -16699,9 +16699,9 @@
                 <a:solidFill>
                   <a:srgbClr val="6B7D74"/>
                 </a:solidFill>
-                <a:latin typeface="맑은 고딕"/>
-                <a:ea typeface="맑은 고딕"/>
-                <a:cs typeface="맑은 고딕"/>
+                <a:latin typeface="Noto Sans KR"/>
+                <a:ea typeface="Noto Sans KR"/>
+                <a:cs typeface="Noto Sans KR"/>
               </a:rPr>
               <a:t>뉴클레오타이드 공급</a:t>
             </a:r>
@@ -17020,9 +17020,9 @@
                 <a:solidFill>
                   <a:srgbClr val="1C8F55"/>
                 </a:solidFill>
-                <a:latin typeface="맑은 고딕"/>
-                <a:ea typeface="맑은 고딕"/>
-                <a:cs typeface="맑은 고딕"/>
+                <a:latin typeface="Noto Sans KR"/>
+                <a:ea typeface="Noto Sans KR"/>
+                <a:cs typeface="Noto Sans KR"/>
               </a:rPr>
               <a:t>5GF · 펩타이드</a:t>
             </a:r>
@@ -17067,9 +17067,9 @@
                 <a:solidFill>
                   <a:srgbClr val="6B7D74"/>
                 </a:solidFill>
-                <a:latin typeface="맑은 고딕"/>
-                <a:ea typeface="맑은 고딕"/>
-                <a:cs typeface="맑은 고딕"/>
+                <a:latin typeface="Noto Sans KR"/>
+                <a:ea typeface="Noto Sans KR"/>
+                <a:cs typeface="Noto Sans KR"/>
               </a:rPr>
               <a:t>성장인자·펩타이드로</a:t>
             </a:r>
@@ -17091,9 +17091,9 @@
                 <a:solidFill>
                   <a:srgbClr val="6B7D74"/>
                 </a:solidFill>
-                <a:latin typeface="맑은 고딕"/>
-                <a:ea typeface="맑은 고딕"/>
-                <a:cs typeface="맑은 고딕"/>
+                <a:latin typeface="Noto Sans KR"/>
+                <a:ea typeface="Noto Sans KR"/>
+                <a:cs typeface="Noto Sans KR"/>
               </a:rPr>
               <a:t>탄력과 밀도 신호 증폭</a:t>
             </a:r>
@@ -17412,9 +17412,9 @@
                 <a:solidFill>
                   <a:srgbClr val="1C8F55"/>
                 </a:solidFill>
-                <a:latin typeface="맑은 고딕"/>
-                <a:ea typeface="맑은 고딕"/>
-                <a:cs typeface="맑은 고딕"/>
+                <a:latin typeface="Noto Sans KR"/>
+                <a:ea typeface="Noto Sans KR"/>
+                <a:cs typeface="Noto Sans KR"/>
               </a:rPr>
               <a:t>세라마이드 · 8중 HA</a:t>
             </a:r>
@@ -17459,9 +17459,9 @@
                 <a:solidFill>
                   <a:srgbClr val="6B7D74"/>
                 </a:solidFill>
-                <a:latin typeface="맑은 고딕"/>
-                <a:ea typeface="맑은 고딕"/>
-                <a:cs typeface="맑은 고딕"/>
+                <a:latin typeface="Noto Sans KR"/>
+                <a:ea typeface="Noto Sans KR"/>
+                <a:cs typeface="Noto Sans KR"/>
               </a:rPr>
               <a:t>장벽을 세우고 수분을</a:t>
             </a:r>
@@ -17483,9 +17483,9 @@
                 <a:solidFill>
                   <a:srgbClr val="6B7D74"/>
                 </a:solidFill>
-                <a:latin typeface="맑은 고딕"/>
-                <a:ea typeface="맑은 고딕"/>
-                <a:cs typeface="맑은 고딕"/>
+                <a:latin typeface="Noto Sans KR"/>
+                <a:ea typeface="Noto Sans KR"/>
+                <a:cs typeface="Noto Sans KR"/>
               </a:rPr>
               <a:t>층층이 고정</a:t>
             </a:r>
@@ -17804,9 +17804,9 @@
                 <a:solidFill>
                   <a:srgbClr val="1C8F55"/>
                 </a:solidFill>
-                <a:latin typeface="맑은 고딕"/>
-                <a:ea typeface="맑은 고딕"/>
-                <a:cs typeface="맑은 고딕"/>
+                <a:latin typeface="Noto Sans KR"/>
+                <a:ea typeface="Noto Sans KR"/>
+                <a:cs typeface="Noto Sans KR"/>
               </a:rPr>
               <a:t>마이크로바이옴</a:t>
             </a:r>
@@ -17851,9 +17851,9 @@
                 <a:solidFill>
                   <a:srgbClr val="6B7D74"/>
                 </a:solidFill>
-                <a:latin typeface="맑은 고딕"/>
-                <a:ea typeface="맑은 고딕"/>
-                <a:cs typeface="맑은 고딕"/>
+                <a:latin typeface="Noto Sans KR"/>
+                <a:ea typeface="Noto Sans KR"/>
+                <a:cs typeface="Noto Sans KR"/>
               </a:rPr>
               <a:t>유익균 밸런스로</a:t>
             </a:r>
@@ -17875,9 +17875,9 @@
                 <a:solidFill>
                   <a:srgbClr val="6B7D74"/>
                 </a:solidFill>
-                <a:latin typeface="맑은 고딕"/>
-                <a:ea typeface="맑은 고딕"/>
-                <a:cs typeface="맑은 고딕"/>
+                <a:latin typeface="Noto Sans KR"/>
+                <a:ea typeface="Noto Sans KR"/>
+                <a:cs typeface="Noto Sans KR"/>
               </a:rPr>
               <a:t>건강한 피부 환경 유지</a:t>
             </a:r>
@@ -17968,9 +17968,9 @@
                 <a:solidFill>
                   <a:srgbClr val="FFFFFF"/>
                 </a:solidFill>
-                <a:latin typeface="맑은 고딕"/>
-                <a:ea typeface="맑은 고딕"/>
-                <a:cs typeface="맑은 고딕"/>
+                <a:latin typeface="Noto Sans KR"/>
+                <a:ea typeface="Noto Sans KR"/>
+                <a:cs typeface="Noto Sans KR"/>
               </a:rPr>
               <a:t>한 병으로 끝나는 재생 루틴 — 복잡한 단계 없이, 올인원 크림 하나로 4단계 케어를 완성합니다.</a:t>
             </a:r>
@@ -18271,9 +18271,9 @@
                 <a:solidFill>
                   <a:srgbClr val="8FE3C4"/>
                 </a:solidFill>
-                <a:latin typeface="맑은 고딕"/>
-                <a:ea typeface="맑은 고딕"/>
-                <a:cs typeface="맑은 고딕"/>
+                <a:latin typeface="Noto Sans KR"/>
+                <a:ea typeface="Noto Sans KR"/>
+                <a:cs typeface="Noto Sans KR"/>
               </a:rPr>
               <a:t>제품 정보와 PDRN 흡수를 높이는 사용 리추얼</a:t>
             </a:r>
@@ -18318,9 +18318,9 @@
                 <a:solidFill>
                   <a:srgbClr val="2EE87F"/>
                 </a:solidFill>
-                <a:latin typeface="맑은 고딕"/>
-                <a:ea typeface="맑은 고딕"/>
-                <a:cs typeface="맑은 고딕"/>
+                <a:latin typeface="Noto Sans KR"/>
+                <a:ea typeface="Noto Sans KR"/>
+                <a:cs typeface="Noto Sans KR"/>
               </a:rPr>
               <a:t>제품명</a:t>
             </a:r>
@@ -18365,9 +18365,9 @@
                 <a:solidFill>
                   <a:srgbClr val="FFFFFF"/>
                 </a:solidFill>
-                <a:latin typeface="맑은 고딕"/>
-                <a:ea typeface="맑은 고딕"/>
-                <a:cs typeface="맑은 고딕"/>
+                <a:latin typeface="Noto Sans KR"/>
+                <a:ea typeface="Noto Sans KR"/>
+                <a:cs typeface="Noto Sans KR"/>
               </a:rPr>
               <a:t>그린셀바이옴 올인원 크림 (GREENCELL BIOME-7™ All-in-One Cream)</a:t>
             </a:r>
@@ -18456,9 +18456,9 @@
                 <a:solidFill>
                   <a:srgbClr val="2EE87F"/>
                 </a:solidFill>
-                <a:latin typeface="맑은 고딕"/>
-                <a:ea typeface="맑은 고딕"/>
-                <a:cs typeface="맑은 고딕"/>
+                <a:latin typeface="Noto Sans KR"/>
+                <a:ea typeface="Noto Sans KR"/>
+                <a:cs typeface="Noto Sans KR"/>
               </a:rPr>
               <a:t>브랜드</a:t>
             </a:r>
@@ -18503,9 +18503,9 @@
                 <a:solidFill>
                   <a:srgbClr val="FFFFFF"/>
                 </a:solidFill>
-                <a:latin typeface="맑은 고딕"/>
-                <a:ea typeface="맑은 고딕"/>
-                <a:cs typeface="맑은 고딕"/>
+                <a:latin typeface="Noto Sans KR"/>
+                <a:ea typeface="Noto Sans KR"/>
+                <a:cs typeface="Noto Sans KR"/>
               </a:rPr>
               <a:t>LOVION  ·  Clean Scientific Cosmetic</a:t>
             </a:r>
@@ -18594,9 +18594,9 @@
                 <a:solidFill>
                   <a:srgbClr val="2EE87F"/>
                 </a:solidFill>
-                <a:latin typeface="맑은 고딕"/>
-                <a:ea typeface="맑은 고딕"/>
-                <a:cs typeface="맑은 고딕"/>
+                <a:latin typeface="Noto Sans KR"/>
+                <a:ea typeface="Noto Sans KR"/>
+                <a:cs typeface="Noto Sans KR"/>
               </a:rPr>
               <a:t>용량</a:t>
             </a:r>
@@ -18641,9 +18641,9 @@
                 <a:solidFill>
                   <a:srgbClr val="FFFFFF"/>
                 </a:solidFill>
-                <a:latin typeface="맑은 고딕"/>
-                <a:ea typeface="맑은 고딕"/>
-                <a:cs typeface="맑은 고딕"/>
+                <a:latin typeface="Noto Sans KR"/>
+                <a:ea typeface="Noto Sans KR"/>
+                <a:cs typeface="Noto Sans KR"/>
               </a:rPr>
               <a:t>50ml (1.69 fl. oz.)</a:t>
             </a:r>
@@ -18732,9 +18732,9 @@
                 <a:solidFill>
                   <a:srgbClr val="2EE87F"/>
                 </a:solidFill>
-                <a:latin typeface="맑은 고딕"/>
-                <a:ea typeface="맑은 고딕"/>
-                <a:cs typeface="맑은 고딕"/>
+                <a:latin typeface="Noto Sans KR"/>
+                <a:ea typeface="Noto Sans KR"/>
+                <a:cs typeface="Noto Sans KR"/>
               </a:rPr>
               <a:t>핵심 설계</a:t>
             </a:r>
@@ -18779,9 +18779,9 @@
                 <a:solidFill>
                   <a:srgbClr val="FFFFFF"/>
                 </a:solidFill>
-                <a:latin typeface="맑은 고딕"/>
-                <a:ea typeface="맑은 고딕"/>
-                <a:cs typeface="맑은 고딕"/>
+                <a:latin typeface="Noto Sans KR"/>
+                <a:ea typeface="Noto Sans KR"/>
+                <a:cs typeface="Noto Sans KR"/>
               </a:rPr>
               <a:t>PDRN CORE + 5GF 나노좀 + 8중 HA + 복합 세라마이드 + 마이크로바이옴</a:t>
             </a:r>
@@ -18870,9 +18870,9 @@
                 <a:solidFill>
                   <a:srgbClr val="2EE87F"/>
                 </a:solidFill>
-                <a:latin typeface="맑은 고딕"/>
-                <a:ea typeface="맑은 고딕"/>
-                <a:cs typeface="맑은 고딕"/>
+                <a:latin typeface="Noto Sans KR"/>
+                <a:ea typeface="Noto Sans KR"/>
+                <a:cs typeface="Noto Sans KR"/>
               </a:rPr>
               <a:t>사용 대상</a:t>
             </a:r>
@@ -18917,9 +18917,9 @@
                 <a:solidFill>
                   <a:srgbClr val="FFFFFF"/>
                 </a:solidFill>
-                <a:latin typeface="맑은 고딕"/>
-                <a:ea typeface="맑은 고딕"/>
-                <a:cs typeface="맑은 고딕"/>
+                <a:latin typeface="Noto Sans KR"/>
+                <a:ea typeface="Noto Sans KR"/>
+                <a:cs typeface="Noto Sans KR"/>
               </a:rPr>
               <a:t>젠더리스 · 전 연령 데일리 케어</a:t>
             </a:r>
@@ -19008,9 +19008,9 @@
                 <a:solidFill>
                   <a:srgbClr val="2EE87F"/>
                 </a:solidFill>
-                <a:latin typeface="맑은 고딕"/>
-                <a:ea typeface="맑은 고딕"/>
-                <a:cs typeface="맑은 고딕"/>
+                <a:latin typeface="Noto Sans KR"/>
+                <a:ea typeface="Noto Sans KR"/>
+                <a:cs typeface="Noto Sans KR"/>
               </a:rPr>
               <a:t>사용 단계</a:t>
             </a:r>
@@ -19055,9 +19055,9 @@
                 <a:solidFill>
                   <a:srgbClr val="FFFFFF"/>
                 </a:solidFill>
-                <a:latin typeface="맑은 고딕"/>
-                <a:ea typeface="맑은 고딕"/>
-                <a:cs typeface="맑은 고딕"/>
+                <a:latin typeface="Noto Sans KR"/>
+                <a:ea typeface="Noto Sans KR"/>
+                <a:cs typeface="Noto Sans KR"/>
               </a:rPr>
               <a:t>세안 후 마지막 단계, 1일 2회 (아침 · 저녁)</a:t>
             </a:r>
@@ -19365,9 +19365,9 @@
                 <a:solidFill>
                   <a:srgbClr val="8FE3C4"/>
                 </a:solidFill>
-                <a:latin typeface="맑은 고딕"/>
-                <a:ea typeface="맑은 고딕"/>
-                <a:cs typeface="맑은 고딕"/>
+                <a:latin typeface="Noto Sans KR"/>
+                <a:ea typeface="Noto Sans KR"/>
+                <a:cs typeface="Noto Sans KR"/>
               </a:rPr>
               <a:t>목선부터 아래에서 위로</a:t>
             </a:r>
@@ -19389,9 +19389,9 @@
                 <a:solidFill>
                   <a:srgbClr val="8FE3C4"/>
                 </a:solidFill>
-                <a:latin typeface="맑은 고딕"/>
-                <a:ea typeface="맑은 고딕"/>
-                <a:cs typeface="맑은 고딕"/>
+                <a:latin typeface="Noto Sans KR"/>
+                <a:ea typeface="Noto Sans KR"/>
+                <a:cs typeface="Noto Sans KR"/>
               </a:rPr>
               <a:t>쓸어 올리며 가볍게 도포</a:t>
             </a:r>
@@ -19538,9 +19538,9 @@
                 <a:solidFill>
                   <a:srgbClr val="8FE3C4"/>
                 </a:solidFill>
-                <a:latin typeface="맑은 고딕"/>
-                <a:ea typeface="맑은 고딕"/>
-                <a:cs typeface="맑은 고딕"/>
+                <a:latin typeface="Noto Sans KR"/>
+                <a:ea typeface="Noto Sans KR"/>
+                <a:cs typeface="Noto Sans KR"/>
               </a:rPr>
               <a:t>턱선·볼·눈가를 리프팅</a:t>
             </a:r>
@@ -19562,9 +19562,9 @@
                 <a:solidFill>
                   <a:srgbClr val="8FE3C4"/>
                 </a:solidFill>
-                <a:latin typeface="맑은 고딕"/>
-                <a:ea typeface="맑은 고딕"/>
-                <a:cs typeface="맑은 고딕"/>
+                <a:latin typeface="Noto Sans KR"/>
+                <a:ea typeface="Noto Sans KR"/>
+                <a:cs typeface="Noto Sans KR"/>
               </a:rPr>
               <a:t>방향으로 꼼꼼히 도포</a:t>
             </a:r>
@@ -19711,9 +19711,9 @@
                 <a:solidFill>
                   <a:srgbClr val="8FE3C4"/>
                 </a:solidFill>
-                <a:latin typeface="맑은 고딕"/>
-                <a:ea typeface="맑은 고딕"/>
-                <a:cs typeface="맑은 고딕"/>
+                <a:latin typeface="Noto Sans KR"/>
+                <a:ea typeface="Noto Sans KR"/>
+                <a:cs typeface="Noto Sans KR"/>
               </a:rPr>
               <a:t>눈썹을 자극하며</a:t>
             </a:r>
@@ -19735,9 +19735,9 @@
                 <a:solidFill>
                   <a:srgbClr val="8FE3C4"/>
                 </a:solidFill>
-                <a:latin typeface="맑은 고딕"/>
-                <a:ea typeface="맑은 고딕"/>
-                <a:cs typeface="맑은 고딕"/>
+                <a:latin typeface="Noto Sans KR"/>
+                <a:ea typeface="Noto Sans KR"/>
+                <a:cs typeface="Noto Sans KR"/>
               </a:rPr>
               <a:t>이마까지 마무리</a:t>
             </a:r>
@@ -19830,9 +19830,9 @@
                 <a:solidFill>
                   <a:srgbClr val="8FE3C4"/>
                 </a:solidFill>
-                <a:latin typeface="맑은 고딕"/>
-                <a:ea typeface="맑은 고딕"/>
-                <a:cs typeface="맑은 고딕"/>
+                <a:latin typeface="Noto Sans KR"/>
+                <a:ea typeface="Noto Sans KR"/>
+                <a:cs typeface="Noto Sans KR"/>
               </a:rPr>
               <a:t>TIP  ·  2~3번 덧바르면 더 깊은 보습과 탄력을 경험할 수 있습니다.</a:t>
             </a:r>
@@ -19877,9 +19877,9 @@
                 <a:solidFill>
                   <a:srgbClr val="8FA599"/>
                 </a:solidFill>
-                <a:latin typeface="맑은 고딕"/>
-                <a:ea typeface="맑은 고딕"/>
-                <a:cs typeface="맑은 고딕"/>
+                <a:latin typeface="Noto Sans KR"/>
+                <a:ea typeface="Noto Sans KR"/>
+                <a:cs typeface="Noto Sans KR"/>
               </a:rPr>
               <a:t>※ 용량은 패키지 라벨 표기(50ml / 1.69 fl. oz.) 기준입니다. 제조사·책임판매업자 등 나머지 표시사항은 최종 패키지 기준으로 확정합니다.</a:t>
             </a:r>
@@ -20180,9 +20180,9 @@
                 <a:solidFill>
                   <a:srgbClr val="1C8F55"/>
                 </a:solidFill>
-                <a:latin typeface="맑은 고딕"/>
-                <a:ea typeface="맑은 고딕"/>
-                <a:cs typeface="맑은 고딕"/>
+                <a:latin typeface="Noto Sans KR"/>
+                <a:ea typeface="Noto Sans KR"/>
+                <a:cs typeface="Noto Sans KR"/>
               </a:rPr>
               <a:t>PDRN 강조 전 반드시 확인해야 하는 항목</a:t>
             </a:r>
@@ -20317,9 +20317,9 @@
                 <a:solidFill>
                   <a:srgbClr val="C87A1E"/>
                 </a:solidFill>
-                <a:latin typeface="맑은 고딕"/>
-                <a:ea typeface="맑은 고딕"/>
-                <a:cs typeface="맑은 고딕"/>
+                <a:latin typeface="Noto Sans KR"/>
+                <a:ea typeface="Noto Sans KR"/>
+                <a:cs typeface="Noto Sans KR"/>
               </a:rPr>
               <a:t>표기명 확정 · 나머지 항목 확인 중</a:t>
             </a:r>
@@ -20364,9 +20364,9 @@
                 <a:solidFill>
                   <a:srgbClr val="142B22"/>
                 </a:solidFill>
-                <a:latin typeface="맑은 고딕"/>
-                <a:ea typeface="맑은 고딕"/>
-                <a:cs typeface="맑은 고딕"/>
+                <a:latin typeface="Noto Sans KR"/>
+                <a:ea typeface="Noto Sans KR"/>
+                <a:cs typeface="Noto Sans KR"/>
               </a:rPr>
               <a:t>PDRN의 전성분 표기명은 소듐디엔에이(Sodium DNA)로 확정되었습니다.</a:t>
             </a:r>
@@ -20388,9 +20388,9 @@
                 <a:solidFill>
                   <a:srgbClr val="142B22"/>
                 </a:solidFill>
-                <a:latin typeface="맑은 고딕"/>
-                <a:ea typeface="맑은 고딕"/>
-                <a:cs typeface="맑은 고딕"/>
+                <a:latin typeface="Noto Sans KR"/>
+                <a:ea typeface="Noto Sans KR"/>
+                <a:cs typeface="Noto Sans KR"/>
               </a:rPr>
               <a:t>함량·유래 등 나머지 항목은 제조사 확인 자료 수령 후 반영합니다.</a:t>
             </a:r>
@@ -20435,9 +20435,9 @@
                 <a:solidFill>
                   <a:srgbClr val="142B22"/>
                 </a:solidFill>
-                <a:latin typeface="맑은 고딕"/>
-                <a:ea typeface="맑은 고딕"/>
-                <a:cs typeface="맑은 고딕"/>
+                <a:latin typeface="Noto Sans KR"/>
+                <a:ea typeface="Noto Sans KR"/>
+                <a:cs typeface="Noto Sans KR"/>
               </a:rPr>
               <a:t>제조사 확인 요청 항목</a:t>
             </a:r>
@@ -20492,9 +20492,9 @@
                 <a:solidFill>
                   <a:srgbClr val="FFFFFF"/>
                 </a:solidFill>
-                <a:latin typeface="맑은 고딕"/>
-                <a:ea typeface="맑은 고딕"/>
-                <a:cs typeface="맑은 고딕"/>
+                <a:latin typeface="Noto Sans KR"/>
+                <a:ea typeface="Noto Sans KR"/>
+                <a:cs typeface="Noto Sans KR"/>
               </a:rPr>
               <a:t/>
             </a:r>
@@ -20539,9 +20539,9 @@
                 <a:solidFill>
                   <a:srgbClr val="6B7D74"/>
                 </a:solidFill>
-                <a:latin typeface="맑은 고딕"/>
-                <a:ea typeface="맑은 고딕"/>
-                <a:cs typeface="맑은 고딕"/>
+                <a:latin typeface="Noto Sans KR"/>
+                <a:ea typeface="Noto Sans KR"/>
+                <a:cs typeface="Noto Sans KR"/>
               </a:rPr>
               <a:t>PDRN 원료의 실제 배합 여부</a:t>
             </a:r>
@@ -20596,9 +20596,9 @@
                 <a:solidFill>
                   <a:srgbClr val="FFFFFF"/>
                 </a:solidFill>
-                <a:latin typeface="맑은 고딕"/>
-                <a:ea typeface="맑은 고딕"/>
-                <a:cs typeface="맑은 고딕"/>
+                <a:latin typeface="Noto Sans KR"/>
+                <a:ea typeface="Noto Sans KR"/>
+                <a:cs typeface="Noto Sans KR"/>
               </a:rPr>
               <a:t/>
             </a:r>
@@ -20643,9 +20643,9 @@
                 <a:solidFill>
                   <a:srgbClr val="6B7D74"/>
                 </a:solidFill>
-                <a:latin typeface="맑은 고딕"/>
-                <a:ea typeface="맑은 고딕"/>
-                <a:cs typeface="맑은 고딕"/>
+                <a:latin typeface="Noto Sans KR"/>
+                <a:ea typeface="Noto Sans KR"/>
+                <a:cs typeface="Noto Sans KR"/>
               </a:rPr>
               <a:t>전성분표상 정확한 표기 성분명</a:t>
             </a:r>
@@ -20700,9 +20700,9 @@
                 <a:solidFill>
                   <a:srgbClr val="FFFFFF"/>
                 </a:solidFill>
-                <a:latin typeface="맑은 고딕"/>
-                <a:ea typeface="맑은 고딕"/>
-                <a:cs typeface="맑은 고딕"/>
+                <a:latin typeface="Noto Sans KR"/>
+                <a:ea typeface="Noto Sans KR"/>
+                <a:cs typeface="Noto Sans KR"/>
               </a:rPr>
               <a:t/>
             </a:r>
@@ -20747,9 +20747,9 @@
                 <a:solidFill>
                   <a:srgbClr val="6B7D74"/>
                 </a:solidFill>
-                <a:latin typeface="맑은 고딕"/>
-                <a:ea typeface="맑은 고딕"/>
-                <a:cs typeface="맑은 고딕"/>
+                <a:latin typeface="Noto Sans KR"/>
+                <a:ea typeface="Noto Sans KR"/>
+                <a:cs typeface="Noto Sans KR"/>
               </a:rPr>
               <a:t>완제품 내 실제 함량 (ppm 또는 %)</a:t>
             </a:r>
@@ -20804,9 +20804,9 @@
                 <a:solidFill>
                   <a:srgbClr val="FFFFFF"/>
                 </a:solidFill>
-                <a:latin typeface="맑은 고딕"/>
-                <a:ea typeface="맑은 고딕"/>
-                <a:cs typeface="맑은 고딕"/>
+                <a:latin typeface="Noto Sans KR"/>
+                <a:ea typeface="Noto Sans KR"/>
+                <a:cs typeface="Noto Sans KR"/>
               </a:rPr>
               <a:t/>
             </a:r>
@@ -20851,9 +20851,9 @@
                 <a:solidFill>
                   <a:srgbClr val="6B7D74"/>
                 </a:solidFill>
-                <a:latin typeface="맑은 고딕"/>
-                <a:ea typeface="맑은 고딕"/>
-                <a:cs typeface="맑은 고딕"/>
+                <a:latin typeface="Noto Sans KR"/>
+                <a:ea typeface="Noto Sans KR"/>
+                <a:cs typeface="Noto Sans KR"/>
               </a:rPr>
               <a:t>유래 (연어 / 식물 등) 및 원산지</a:t>
             </a:r>
@@ -20908,9 +20908,9 @@
                 <a:solidFill>
                   <a:srgbClr val="FFFFFF"/>
                 </a:solidFill>
-                <a:latin typeface="맑은 고딕"/>
-                <a:ea typeface="맑은 고딕"/>
-                <a:cs typeface="맑은 고딕"/>
+                <a:latin typeface="Noto Sans KR"/>
+                <a:ea typeface="Noto Sans KR"/>
+                <a:cs typeface="Noto Sans KR"/>
               </a:rPr>
               <a:t/>
             </a:r>
@@ -20955,9 +20955,9 @@
                 <a:solidFill>
                   <a:srgbClr val="6B7D74"/>
                 </a:solidFill>
-                <a:latin typeface="맑은 고딕"/>
-                <a:ea typeface="맑은 고딕"/>
-                <a:cs typeface="맑은 고딕"/>
+                <a:latin typeface="Noto Sans KR"/>
+                <a:ea typeface="Noto Sans KR"/>
+                <a:cs typeface="Noto Sans KR"/>
               </a:rPr>
               <a:t>원료 규격서 · 시험성적서</a:t>
             </a:r>
@@ -21012,9 +21012,9 @@
                 <a:solidFill>
                   <a:srgbClr val="FFFFFF"/>
                 </a:solidFill>
-                <a:latin typeface="맑은 고딕"/>
-                <a:ea typeface="맑은 고딕"/>
-                <a:cs typeface="맑은 고딕"/>
+                <a:latin typeface="Noto Sans KR"/>
+                <a:ea typeface="Noto Sans KR"/>
+                <a:cs typeface="Noto Sans KR"/>
               </a:rPr>
               <a:t/>
             </a:r>
@@ -21059,9 +21059,9 @@
                 <a:solidFill>
                   <a:srgbClr val="6B7D74"/>
                 </a:solidFill>
-                <a:latin typeface="맑은 고딕"/>
-                <a:ea typeface="맑은 고딕"/>
-                <a:cs typeface="맑은 고딕"/>
+                <a:latin typeface="Noto Sans KR"/>
+                <a:ea typeface="Noto Sans KR"/>
+                <a:cs typeface="Noto Sans KR"/>
               </a:rPr>
               <a:t>기존 생산분 / 신규 처방 적용 범위</a:t>
             </a:r>
@@ -21106,9 +21106,9 @@
                 <a:solidFill>
                   <a:srgbClr val="142B22"/>
                 </a:solidFill>
-                <a:latin typeface="맑은 고딕"/>
-                <a:ea typeface="맑은 고딕"/>
-                <a:cs typeface="맑은 고딕"/>
+                <a:latin typeface="Noto Sans KR"/>
+                <a:ea typeface="Noto Sans KR"/>
+                <a:cs typeface="Noto Sans KR"/>
               </a:rPr>
               <a:t>표현 가이드</a:t>
             </a:r>
@@ -21199,9 +21199,9 @@
                 <a:solidFill>
                   <a:srgbClr val="1C8F55"/>
                 </a:solidFill>
-                <a:latin typeface="맑은 고딕"/>
-                <a:ea typeface="맑은 고딕"/>
-                <a:cs typeface="맑은 고딕"/>
+                <a:latin typeface="Noto Sans KR"/>
+                <a:ea typeface="Noto Sans KR"/>
+                <a:cs typeface="Noto Sans KR"/>
               </a:rPr>
               <a:t>사용 가능 (확정 후)</a:t>
             </a:r>
@@ -21246,9 +21246,9 @@
                 <a:solidFill>
                   <a:srgbClr val="142B22"/>
                 </a:solidFill>
-                <a:latin typeface="맑은 고딕"/>
-                <a:ea typeface="맑은 고딕"/>
-                <a:cs typeface="맑은 고딕"/>
+                <a:latin typeface="Noto Sans KR"/>
+                <a:ea typeface="Noto Sans KR"/>
+                <a:cs typeface="Noto Sans KR"/>
               </a:rPr>
               <a:t>“PDRN 성분 함유”, “피부 진정·탄력에 도움”, “장벽 강화 보습”</a:t>
             </a:r>
@@ -21339,9 +21339,9 @@
                 <a:solidFill>
                   <a:srgbClr val="C0392B"/>
                 </a:solidFill>
-                <a:latin typeface="맑은 고딕"/>
-                <a:ea typeface="맑은 고딕"/>
-                <a:cs typeface="맑은 고딕"/>
+                <a:latin typeface="Noto Sans KR"/>
+                <a:ea typeface="Noto Sans KR"/>
+                <a:cs typeface="Noto Sans KR"/>
               </a:rPr>
               <a:t>사용 불가</a:t>
             </a:r>
@@ -21386,9 +21386,9 @@
                 <a:solidFill>
                   <a:srgbClr val="142B22"/>
                 </a:solidFill>
-                <a:latin typeface="맑은 고딕"/>
-                <a:ea typeface="맑은 고딕"/>
-                <a:cs typeface="맑은 고딕"/>
+                <a:latin typeface="Noto Sans KR"/>
+                <a:ea typeface="Noto Sans KR"/>
+                <a:cs typeface="Noto Sans KR"/>
               </a:rPr>
               <a:t>“세포 재생·치료·주사 효과 동일”, “의약품적 효능” 표현</a:t>
             </a:r>
@@ -21433,9 +21433,9 @@
                 <a:solidFill>
                   <a:srgbClr val="C87A1E"/>
                 </a:solidFill>
-                <a:latin typeface="맑은 고딕"/>
-                <a:ea typeface="맑은 고딕"/>
-                <a:cs typeface="맑은 고딕"/>
+                <a:latin typeface="Noto Sans KR"/>
+                <a:ea typeface="Noto Sans KR"/>
+                <a:cs typeface="Noto Sans KR"/>
               </a:rPr>
               <a:t>※ 발효추출물·캘러스배양추출물은 PDRN과 동일 원료로 볼 수 없습니다.</a:t>
             </a:r>
